--- a/附件4：技術職認證參評報告-2-1&2-2研發工程師 - 王磊.pptx
+++ b/附件4：技術職認證參評報告-2-1&2-2研發工程師 - 王磊.pptx
@@ -1,25 +1,26 @@
 
 <file path=ppt/presentation.xml><?xml version="1.0" encoding="utf-8"?>
-<p:presentation xmlns:a="http://schemas.openxmlformats.org/drawingml/2006/main" xmlns:r="http://schemas.openxmlformats.org/officeDocument/2006/relationships" xmlns:p="http://schemas.openxmlformats.org/presentationml/2006/main" showSpecialPlsOnTitleSld="0" saveSubsetFonts="1" autoCompressPictures="0">
+<p:presentation xmlns:a="http://schemas.openxmlformats.org/drawingml/2006/main" xmlns:r="http://schemas.openxmlformats.org/officeDocument/2006/relationships" xmlns:p="http://schemas.openxmlformats.org/presentationml/2006/main" showSpecialPlsOnTitleSld="0" autoCompressPictures="0">
   <p:sldMasterIdLst>
-    <p:sldMasterId id="2147483670" r:id="rId1"/>
+    <p:sldMasterId id="2147483648" r:id="rId1"/>
   </p:sldMasterIdLst>
   <p:notesMasterIdLst>
-    <p:notesMasterId r:id="rId8"/>
+    <p:notesMasterId r:id="rId4"/>
   </p:notesMasterIdLst>
   <p:handoutMasterIdLst>
-    <p:handoutMasterId r:id="rId9"/>
+    <p:handoutMasterId r:id="rId11"/>
   </p:handoutMasterIdLst>
   <p:sldIdLst>
-    <p:sldId id="282" r:id="rId2"/>
-    <p:sldId id="283" r:id="rId3"/>
-    <p:sldId id="284" r:id="rId4"/>
-    <p:sldId id="288" r:id="rId5"/>
-    <p:sldId id="289" r:id="rId6"/>
-    <p:sldId id="290" r:id="rId7"/>
+    <p:sldId id="282" r:id="rId3"/>
+    <p:sldId id="283" r:id="rId5"/>
+    <p:sldId id="284" r:id="rId6"/>
+    <p:sldId id="288" r:id="rId7"/>
+    <p:sldId id="289" r:id="rId8"/>
+    <p:sldId id="291" r:id="rId9"/>
+    <p:sldId id="290" r:id="rId10"/>
   </p:sldIdLst>
   <p:sldSz cx="12192000" cy="6858000"/>
-  <p:notesSz cx="6797675" cy="9926638"/>
+  <p:notesSz cx="6797675" cy="9926320"/>
   <p:defaultTextStyle>
     <a:defPPr rtl="0">
       <a:defRPr lang="zh-CN"/>
@@ -115,25 +116,6 @@
       </a:defRPr>
     </a:lvl9pPr>
   </p:defaultTextStyle>
-  <p:extLst>
-    <p:ext uri="{EFAFB233-063F-42B5-8137-9DF3F51BA10A}">
-      <p15:sldGuideLst xmlns:p15="http://schemas.microsoft.com/office/powerpoint/2012/main">
-        <p15:guide id="1" pos="3840" userDrawn="1">
-          <p15:clr>
-            <a:srgbClr val="A4A3A4"/>
-          </p15:clr>
-        </p15:guide>
-        <p15:guide id="2" orient="horz" pos="2160" userDrawn="1">
-          <p15:clr>
-            <a:srgbClr val="A4A3A4"/>
-          </p15:clr>
-        </p15:guide>
-      </p15:sldGuideLst>
-    </p:ext>
-    <p:ext uri="{2D200454-40CA-4A62-9FC3-DE9A4176ACB9}">
-      <p15:notesGuideLst xmlns:p15="http://schemas.microsoft.com/office/powerpoint/2012/main"/>
-    </p:ext>
-  </p:extLst>
 </p:presentation>
 </file>
 
@@ -227,8 +209,6 @@
                 <a:latin typeface="微软雅黑" panose="020B0503020204020204" pitchFamily="34" charset="-122"/>
                 <a:ea typeface="微软雅黑" panose="020B0503020204020204" pitchFamily="34" charset="-122"/>
               </a:rPr>
-              <a:pPr rtl="0"/>
-              <a:t>2021年7月20日</a:t>
             </a:fld>
             <a:endParaRPr lang="zh-CN" altLang="en-US" dirty="0">
               <a:latin typeface="微软雅黑" panose="020B0503020204020204" pitchFamily="34" charset="-122"/>
@@ -305,8 +285,6 @@
                 <a:latin typeface="微软雅黑" panose="020B0503020204020204" pitchFamily="34" charset="-122"/>
                 <a:ea typeface="微软雅黑" panose="020B0503020204020204" pitchFamily="34" charset="-122"/>
               </a:rPr>
-              <a:pPr rtl="0"/>
-              <a:t>‹#›</a:t>
             </a:fld>
             <a:endParaRPr lang="zh-CN" altLang="en-US" dirty="0">
               <a:latin typeface="微软雅黑" panose="020B0503020204020204" pitchFamily="34" charset="-122"/>
@@ -316,11 +294,6 @@
         </p:txBody>
       </p:sp>
     </p:spTree>
-    <p:extLst>
-      <p:ext uri="{BB962C8B-B14F-4D97-AF65-F5344CB8AC3E}">
-        <p14:creationId xmlns:p14="http://schemas.microsoft.com/office/powerpoint/2010/main" val="4247389152"/>
-      </p:ext>
-    </p:extLst>
   </p:cSld>
   <p:clrMap bg1="lt1" tx1="dk1" bg2="lt2" tx2="dk2" accent1="accent1" accent2="accent2" accent3="accent3" accent4="accent4" accent5="accent5" accent6="accent6" hlink="hlink" folHlink="folHlink"/>
 </p:handoutMaster>
@@ -414,8 +387,6 @@
           <a:p>
             <a:fld id="{EA50F75F-AD11-4973-BAED-59A0098129E9}" type="datetime2">
               <a:rPr lang="zh-CN" altLang="en-US" smtClean="0"/>
-              <a:pPr/>
-              <a:t>2021年7月20日</a:t>
             </a:fld>
             <a:endParaRPr lang="zh-CN" altLang="en-US" dirty="0"/>
           </a:p>
@@ -483,6 +454,7 @@
               <a:rPr lang="zh-CN" altLang="en-US" noProof="0" dirty="0"/>
               <a:t>单击此处编辑母版文本样式</a:t>
             </a:r>
+            <a:endParaRPr lang="zh-CN" altLang="en-US" noProof="0" dirty="0"/>
           </a:p>
           <a:p>
             <a:pPr lvl="1" rtl="0"/>
@@ -490,6 +462,7 @@
               <a:rPr lang="zh-CN" altLang="en-US" noProof="0" dirty="0"/>
               <a:t>第二级</a:t>
             </a:r>
+            <a:endParaRPr lang="zh-CN" altLang="en-US" noProof="0" dirty="0"/>
           </a:p>
           <a:p>
             <a:pPr lvl="2" rtl="0"/>
@@ -497,6 +470,7 @@
               <a:rPr lang="zh-CN" altLang="en-US" noProof="0" dirty="0"/>
               <a:t>第三级</a:t>
             </a:r>
+            <a:endParaRPr lang="zh-CN" altLang="en-US" noProof="0" dirty="0"/>
           </a:p>
           <a:p>
             <a:pPr lvl="3" rtl="0"/>
@@ -504,6 +478,7 @@
               <a:rPr lang="zh-CN" altLang="en-US" noProof="0" dirty="0"/>
               <a:t>第四级</a:t>
             </a:r>
+            <a:endParaRPr lang="zh-CN" altLang="en-US" noProof="0" dirty="0"/>
           </a:p>
           <a:p>
             <a:pPr lvl="4" rtl="0"/>
@@ -511,6 +486,7 @@
               <a:rPr lang="zh-CN" altLang="en-US" noProof="0" dirty="0"/>
               <a:t>第五级</a:t>
             </a:r>
+            <a:endParaRPr lang="zh-CN" altLang="en-US" noProof="0" dirty="0"/>
           </a:p>
         </p:txBody>
       </p:sp>
@@ -580,19 +556,12 @@
           <a:p>
             <a:fld id="{82869989-EB00-4EE7-BCB5-25BDC5BB29F8}" type="slidenum">
               <a:rPr lang="en-US" altLang="zh-CN" smtClean="0"/>
-              <a:pPr/>
-              <a:t>‹#›</a:t>
             </a:fld>
             <a:endParaRPr lang="zh-CN" altLang="en-US" dirty="0"/>
           </a:p>
         </p:txBody>
       </p:sp>
     </p:spTree>
-    <p:extLst>
-      <p:ext uri="{BB962C8B-B14F-4D97-AF65-F5344CB8AC3E}">
-        <p14:creationId xmlns:p14="http://schemas.microsoft.com/office/powerpoint/2010/main" val="2193636149"/>
-      </p:ext>
-    </p:extLst>
   </p:cSld>
   <p:clrMap bg1="lt1" tx1="dk1" bg2="lt2" tx2="dk2" accent1="accent1" accent2="accent2" accent3="accent3" accent4="accent4" accent5="accent5" accent6="accent6" hlink="hlink" folHlink="folHlink"/>
   <p:notesStyle>
@@ -760,19 +729,12 @@
             <a:pPr rtl="0"/>
             <a:fld id="{82869989-EB00-4EE7-BCB5-25BDC5BB29F8}" type="slidenum">
               <a:rPr lang="en-US" altLang="zh-CN" smtClean="0"/>
-              <a:pPr rtl="0"/>
-              <a:t>1</a:t>
             </a:fld>
             <a:endParaRPr lang="zh-CN" altLang="en-US" dirty="0"/>
           </a:p>
         </p:txBody>
       </p:sp>
     </p:spTree>
-    <p:extLst>
-      <p:ext uri="{BB962C8B-B14F-4D97-AF65-F5344CB8AC3E}">
-        <p14:creationId xmlns:p14="http://schemas.microsoft.com/office/powerpoint/2010/main" val="1980303916"/>
-      </p:ext>
-    </p:extLst>
   </p:cSld>
   <p:clrMapOvr>
     <a:masterClrMapping/>
@@ -911,8 +873,6 @@
           <a:p>
             <a:fld id="{5DD292E4-C117-4AE5-8BCA-334E149AE116}" type="datetimeFigureOut">
               <a:rPr lang="zh-TW" altLang="en-US" smtClean="0"/>
-              <a:pPr/>
-              <a:t>2021/7/20</a:t>
             </a:fld>
             <a:endParaRPr lang="zh-TW" altLang="en-US"/>
           </a:p>
@@ -954,8 +914,6 @@
           <a:p>
             <a:fld id="{E31375A4-56A4-47D6-9801-1991572033F7}" type="slidenum">
               <a:rPr lang="en-US" altLang="zh-CN" noProof="0" smtClean="0"/>
-              <a:pPr/>
-              <a:t>‹#›</a:t>
             </a:fld>
             <a:endParaRPr lang="zh-CN" altLang="en-US" noProof="0" dirty="0"/>
           </a:p>
@@ -2816,22 +2774,17 @@
         </p:style>
       </p:cxnSp>
     </p:spTree>
-    <p:extLst>
-      <p:ext uri="{BB962C8B-B14F-4D97-AF65-F5344CB8AC3E}">
-        <p14:creationId xmlns:p14="http://schemas.microsoft.com/office/powerpoint/2010/main" val="3386584974"/>
-      </p:ext>
-    </p:extLst>
   </p:cSld>
   <p:clrMapOvr>
     <a:masterClrMapping/>
   </p:clrMapOvr>
-  <mc:AlternateContent xmlns:mc="http://schemas.openxmlformats.org/markup-compatibility/2006" xmlns:p14="http://schemas.microsoft.com/office/powerpoint/2010/main">
-    <mc:Choice Requires="p14">
+  <mc:AlternateContent xmlns:mc="http://schemas.openxmlformats.org/markup-compatibility/2006">
+    <mc:Choice xmlns:p14="http://schemas.microsoft.com/office/powerpoint/2010/main" Requires="p14">
       <p:transition spd="med" p14:dur="700">
         <p:fade/>
       </p:transition>
     </mc:Choice>
-    <mc:Fallback xmlns="">
+    <mc:Fallback>
       <p:transition spd="med">
         <p:fade/>
       </p:transition>
@@ -2907,6 +2860,7 @@
               <a:rPr lang="zh-CN" altLang="en-US" smtClean="0"/>
               <a:t>单击此处编辑母版文本样式</a:t>
             </a:r>
+            <a:endParaRPr lang="zh-CN" altLang="en-US" smtClean="0"/>
           </a:p>
           <a:p>
             <a:pPr lvl="1"/>
@@ -2914,6 +2868,7 @@
               <a:rPr lang="zh-CN" altLang="en-US" smtClean="0"/>
               <a:t>第二级</a:t>
             </a:r>
+            <a:endParaRPr lang="zh-CN" altLang="en-US" smtClean="0"/>
           </a:p>
           <a:p>
             <a:pPr lvl="2"/>
@@ -2921,6 +2876,7 @@
               <a:rPr lang="zh-CN" altLang="en-US" smtClean="0"/>
               <a:t>第三级</a:t>
             </a:r>
+            <a:endParaRPr lang="zh-CN" altLang="en-US" smtClean="0"/>
           </a:p>
           <a:p>
             <a:pPr lvl="3"/>
@@ -2928,6 +2884,7 @@
               <a:rPr lang="zh-CN" altLang="en-US" smtClean="0"/>
               <a:t>第四级</a:t>
             </a:r>
+            <a:endParaRPr lang="zh-CN" altLang="en-US" smtClean="0"/>
           </a:p>
           <a:p>
             <a:pPr lvl="4"/>
@@ -2956,8 +2913,6 @@
           <a:p>
             <a:fld id="{315EC09C-6658-4B3F-8DB1-134C6DD59176}" type="datetime2">
               <a:rPr lang="zh-CN" altLang="en-US" smtClean="0"/>
-              <a:pPr/>
-              <a:t>2021年7月20日</a:t>
             </a:fld>
             <a:endParaRPr lang="zh-CN" altLang="en-US" dirty="0"/>
           </a:p>
@@ -3005,30 +2960,23 @@
             <a:pPr rtl="0"/>
             <a:fld id="{E31375A4-56A4-47D6-9801-1991572033F7}" type="slidenum">
               <a:rPr lang="en-US" altLang="zh-CN" noProof="0" smtClean="0"/>
-              <a:pPr rtl="0"/>
-              <a:t>‹#›</a:t>
             </a:fld>
             <a:endParaRPr lang="zh-CN" altLang="en-US" noProof="0" dirty="0"/>
           </a:p>
         </p:txBody>
       </p:sp>
     </p:spTree>
-    <p:extLst>
-      <p:ext uri="{BB962C8B-B14F-4D97-AF65-F5344CB8AC3E}">
-        <p14:creationId xmlns:p14="http://schemas.microsoft.com/office/powerpoint/2010/main" val="195145007"/>
-      </p:ext>
-    </p:extLst>
   </p:cSld>
   <p:clrMapOvr>
     <a:masterClrMapping/>
   </p:clrMapOvr>
-  <mc:AlternateContent xmlns:mc="http://schemas.openxmlformats.org/markup-compatibility/2006" xmlns:p14="http://schemas.microsoft.com/office/powerpoint/2010/main">
-    <mc:Choice Requires="p14">
+  <mc:AlternateContent xmlns:mc="http://schemas.openxmlformats.org/markup-compatibility/2006">
+    <mc:Choice xmlns:p14="http://schemas.microsoft.com/office/powerpoint/2010/main" Requires="p14">
       <p:transition spd="med" p14:dur="700">
         <p:fade/>
       </p:transition>
     </mc:Choice>
-    <mc:Fallback xmlns="">
+    <mc:Fallback>
       <p:transition spd="med">
         <p:fade/>
       </p:transition>
@@ -3114,6 +3062,7 @@
               <a:rPr lang="zh-CN" altLang="en-US" smtClean="0"/>
               <a:t>单击此处编辑母版文本样式</a:t>
             </a:r>
+            <a:endParaRPr lang="zh-CN" altLang="en-US" smtClean="0"/>
           </a:p>
           <a:p>
             <a:pPr lvl="1"/>
@@ -3121,6 +3070,7 @@
               <a:rPr lang="zh-CN" altLang="en-US" smtClean="0"/>
               <a:t>第二级</a:t>
             </a:r>
+            <a:endParaRPr lang="zh-CN" altLang="en-US" smtClean="0"/>
           </a:p>
           <a:p>
             <a:pPr lvl="2"/>
@@ -3128,6 +3078,7 @@
               <a:rPr lang="zh-CN" altLang="en-US" smtClean="0"/>
               <a:t>第三级</a:t>
             </a:r>
+            <a:endParaRPr lang="zh-CN" altLang="en-US" smtClean="0"/>
           </a:p>
           <a:p>
             <a:pPr lvl="3"/>
@@ -3135,6 +3086,7 @@
               <a:rPr lang="zh-CN" altLang="en-US" smtClean="0"/>
               <a:t>第四级</a:t>
             </a:r>
+            <a:endParaRPr lang="zh-CN" altLang="en-US" smtClean="0"/>
           </a:p>
           <a:p>
             <a:pPr lvl="4"/>
@@ -3163,8 +3115,6 @@
           <a:p>
             <a:fld id="{597EE274-C014-4170-9D78-BB3EE034439F}" type="datetime2">
               <a:rPr lang="zh-CN" altLang="en-US" smtClean="0"/>
-              <a:pPr/>
-              <a:t>2021年7月20日</a:t>
             </a:fld>
             <a:endParaRPr lang="zh-CN" altLang="en-US" dirty="0"/>
           </a:p>
@@ -3210,23 +3160,28 @@
           <a:p>
             <a:fld id="{E31375A4-56A4-47D6-9801-1991572033F7}" type="slidenum">
               <a:rPr lang="en-US" altLang="zh-CN" noProof="0" smtClean="0"/>
-              <a:pPr/>
-              <a:t>‹#›</a:t>
             </a:fld>
             <a:endParaRPr lang="zh-CN" altLang="en-US" noProof="0" dirty="0"/>
           </a:p>
         </p:txBody>
       </p:sp>
     </p:spTree>
-    <p:extLst>
-      <p:ext uri="{BB962C8B-B14F-4D97-AF65-F5344CB8AC3E}">
-        <p14:creationId xmlns:p14="http://schemas.microsoft.com/office/powerpoint/2010/main" val="1773093264"/>
-      </p:ext>
-    </p:extLst>
   </p:cSld>
   <p:clrMapOvr>
     <a:masterClrMapping/>
   </p:clrMapOvr>
+  <mc:AlternateContent xmlns:mc="http://schemas.openxmlformats.org/markup-compatibility/2006">
+    <mc:Choice xmlns:p14="http://schemas.microsoft.com/office/powerpoint/2010/main" Requires="p14">
+      <p:transition spd="med" p14:dur="700">
+        <p:fade/>
+      </p:transition>
+    </mc:Choice>
+    <mc:Fallback>
+      <p:transition spd="med">
+        <p:fade/>
+      </p:transition>
+    </mc:Fallback>
+  </mc:AlternateContent>
   <p:hf hdr="0" ftr="0" dt="0"/>
 </p:sldLayout>
 </file>
@@ -3291,6 +3246,7 @@
               <a:rPr lang="zh-CN" altLang="en-US" smtClean="0"/>
               <a:t>单击此处编辑母版文本样式</a:t>
             </a:r>
+            <a:endParaRPr lang="zh-CN" altLang="en-US" smtClean="0"/>
           </a:p>
           <a:p>
             <a:pPr lvl="1"/>
@@ -3298,6 +3254,7 @@
               <a:rPr lang="zh-CN" altLang="en-US" smtClean="0"/>
               <a:t>第二级</a:t>
             </a:r>
+            <a:endParaRPr lang="zh-CN" altLang="en-US" smtClean="0"/>
           </a:p>
           <a:p>
             <a:pPr lvl="2"/>
@@ -3305,6 +3262,7 @@
               <a:rPr lang="zh-CN" altLang="en-US" smtClean="0"/>
               <a:t>第三级</a:t>
             </a:r>
+            <a:endParaRPr lang="zh-CN" altLang="en-US" smtClean="0"/>
           </a:p>
           <a:p>
             <a:pPr lvl="3"/>
@@ -3312,6 +3270,7 @@
               <a:rPr lang="zh-CN" altLang="en-US" smtClean="0"/>
               <a:t>第四级</a:t>
             </a:r>
+            <a:endParaRPr lang="zh-CN" altLang="en-US" smtClean="0"/>
           </a:p>
           <a:p>
             <a:pPr lvl="4"/>
@@ -3340,8 +3299,6 @@
           <a:p>
             <a:fld id="{76486692-0600-494D-A58B-8346A1607219}" type="datetime2">
               <a:rPr lang="zh-CN" altLang="en-US" smtClean="0"/>
-              <a:pPr/>
-              <a:t>2021年7月20日</a:t>
             </a:fld>
             <a:endParaRPr lang="zh-CN" altLang="en-US" dirty="0"/>
           </a:p>
@@ -3389,30 +3346,23 @@
             <a:pPr rtl="0"/>
             <a:fld id="{E31375A4-56A4-47D6-9801-1991572033F7}" type="slidenum">
               <a:rPr lang="en-US" altLang="zh-CN" smtClean="0"/>
-              <a:pPr rtl="0"/>
-              <a:t>‹#›</a:t>
             </a:fld>
             <a:endParaRPr lang="zh-CN" altLang="en-US" dirty="0"/>
           </a:p>
         </p:txBody>
       </p:sp>
     </p:spTree>
-    <p:extLst>
-      <p:ext uri="{BB962C8B-B14F-4D97-AF65-F5344CB8AC3E}">
-        <p14:creationId xmlns:p14="http://schemas.microsoft.com/office/powerpoint/2010/main" val="1104651104"/>
-      </p:ext>
-    </p:extLst>
   </p:cSld>
   <p:clrMapOvr>
     <a:masterClrMapping/>
   </p:clrMapOvr>
-  <mc:AlternateContent xmlns:mc="http://schemas.openxmlformats.org/markup-compatibility/2006" xmlns:p14="http://schemas.microsoft.com/office/powerpoint/2010/main">
-    <mc:Choice Requires="p14">
+  <mc:AlternateContent xmlns:mc="http://schemas.openxmlformats.org/markup-compatibility/2006">
+    <mc:Choice xmlns:p14="http://schemas.microsoft.com/office/powerpoint/2010/main" Requires="p14">
       <p:transition spd="med" p14:dur="700">
         <p:fade/>
       </p:transition>
     </mc:Choice>
-    <mc:Fallback xmlns="">
+    <mc:Fallback>
       <p:transition spd="med">
         <p:fade/>
       </p:transition>
@@ -3593,6 +3543,7 @@
               <a:rPr lang="zh-CN" altLang="en-US" smtClean="0"/>
               <a:t>单击此处编辑母版文本样式</a:t>
             </a:r>
+            <a:endParaRPr lang="zh-CN" altLang="en-US" smtClean="0"/>
           </a:p>
         </p:txBody>
       </p:sp>
@@ -3613,8 +3564,6 @@
           <a:p>
             <a:fld id="{5DD292E4-C117-4AE5-8BCA-334E149AE116}" type="datetimeFigureOut">
               <a:rPr lang="zh-TW" altLang="en-US" smtClean="0"/>
-              <a:pPr/>
-              <a:t>2021/7/20</a:t>
             </a:fld>
             <a:endParaRPr lang="zh-TW" altLang="en-US"/>
           </a:p>
@@ -3656,8 +3605,6 @@
           <a:p>
             <a:fld id="{FE844DCD-E941-46B3-ADE3-0AFD533C6B28}" type="slidenum">
               <a:rPr lang="zh-TW" altLang="en-US" smtClean="0"/>
-              <a:pPr/>
-              <a:t>‹#›</a:t>
             </a:fld>
             <a:endParaRPr lang="zh-TW" altLang="en-US"/>
           </a:p>
@@ -5522,22 +5469,17 @@
         </p:style>
       </p:cxnSp>
     </p:spTree>
-    <p:extLst>
-      <p:ext uri="{BB962C8B-B14F-4D97-AF65-F5344CB8AC3E}">
-        <p14:creationId xmlns:p14="http://schemas.microsoft.com/office/powerpoint/2010/main" val="2200040330"/>
-      </p:ext>
-    </p:extLst>
   </p:cSld>
   <p:clrMapOvr>
     <a:masterClrMapping/>
   </p:clrMapOvr>
-  <mc:AlternateContent xmlns:mc="http://schemas.openxmlformats.org/markup-compatibility/2006" xmlns:p14="http://schemas.microsoft.com/office/powerpoint/2010/main">
-    <mc:Choice Requires="p14">
+  <mc:AlternateContent xmlns:mc="http://schemas.openxmlformats.org/markup-compatibility/2006">
+    <mc:Choice xmlns:p14="http://schemas.microsoft.com/office/powerpoint/2010/main" Requires="p14">
       <p:transition spd="med" p14:dur="700">
         <p:fade/>
       </p:transition>
     </mc:Choice>
-    <mc:Fallback xmlns="">
+    <mc:Fallback>
       <p:transition spd="med">
         <p:fade/>
       </p:transition>
@@ -5618,6 +5560,7 @@
               <a:rPr lang="zh-CN" altLang="en-US" smtClean="0"/>
               <a:t>单击此处编辑母版文本样式</a:t>
             </a:r>
+            <a:endParaRPr lang="zh-CN" altLang="en-US" smtClean="0"/>
           </a:p>
           <a:p>
             <a:pPr lvl="1"/>
@@ -5625,6 +5568,7 @@
               <a:rPr lang="zh-CN" altLang="en-US" smtClean="0"/>
               <a:t>第二级</a:t>
             </a:r>
+            <a:endParaRPr lang="zh-CN" altLang="en-US" smtClean="0"/>
           </a:p>
           <a:p>
             <a:pPr lvl="2"/>
@@ -5632,6 +5576,7 @@
               <a:rPr lang="zh-CN" altLang="en-US" smtClean="0"/>
               <a:t>第三级</a:t>
             </a:r>
+            <a:endParaRPr lang="zh-CN" altLang="en-US" smtClean="0"/>
           </a:p>
           <a:p>
             <a:pPr lvl="3"/>
@@ -5639,6 +5584,7 @@
               <a:rPr lang="zh-CN" altLang="en-US" smtClean="0"/>
               <a:t>第四级</a:t>
             </a:r>
+            <a:endParaRPr lang="zh-CN" altLang="en-US" smtClean="0"/>
           </a:p>
           <a:p>
             <a:pPr lvl="4"/>
@@ -5675,6 +5621,7 @@
               <a:rPr lang="zh-CN" altLang="en-US" smtClean="0"/>
               <a:t>单击此处编辑母版文本样式</a:t>
             </a:r>
+            <a:endParaRPr lang="zh-CN" altLang="en-US" smtClean="0"/>
           </a:p>
           <a:p>
             <a:pPr lvl="1"/>
@@ -5682,6 +5629,7 @@
               <a:rPr lang="zh-CN" altLang="en-US" smtClean="0"/>
               <a:t>第二级</a:t>
             </a:r>
+            <a:endParaRPr lang="zh-CN" altLang="en-US" smtClean="0"/>
           </a:p>
           <a:p>
             <a:pPr lvl="2"/>
@@ -5689,6 +5637,7 @@
               <a:rPr lang="zh-CN" altLang="en-US" smtClean="0"/>
               <a:t>第三级</a:t>
             </a:r>
+            <a:endParaRPr lang="zh-CN" altLang="en-US" smtClean="0"/>
           </a:p>
           <a:p>
             <a:pPr lvl="3"/>
@@ -5696,6 +5645,7 @@
               <a:rPr lang="zh-CN" altLang="en-US" smtClean="0"/>
               <a:t>第四级</a:t>
             </a:r>
+            <a:endParaRPr lang="zh-CN" altLang="en-US" smtClean="0"/>
           </a:p>
           <a:p>
             <a:pPr lvl="4"/>
@@ -5724,8 +5674,6 @@
           <a:p>
             <a:fld id="{4FBFDCFB-9841-4E8E-A26A-EE55E04AFFB4}" type="datetime2">
               <a:rPr lang="zh-CN" altLang="en-US" smtClean="0"/>
-              <a:pPr/>
-              <a:t>2021年7月20日</a:t>
             </a:fld>
             <a:endParaRPr lang="zh-CN" altLang="en-US" dirty="0"/>
           </a:p>
@@ -5773,30 +5721,23 @@
             <a:pPr rtl="0"/>
             <a:fld id="{E31375A4-56A4-47D6-9801-1991572033F7}" type="slidenum">
               <a:rPr lang="en-US" altLang="zh-CN" smtClean="0"/>
-              <a:pPr rtl="0"/>
-              <a:t>‹#›</a:t>
             </a:fld>
             <a:endParaRPr lang="zh-CN" altLang="en-US" dirty="0"/>
           </a:p>
         </p:txBody>
       </p:sp>
     </p:spTree>
-    <p:extLst>
-      <p:ext uri="{BB962C8B-B14F-4D97-AF65-F5344CB8AC3E}">
-        <p14:creationId xmlns:p14="http://schemas.microsoft.com/office/powerpoint/2010/main" val="1069631654"/>
-      </p:ext>
-    </p:extLst>
   </p:cSld>
   <p:clrMapOvr>
     <a:masterClrMapping/>
   </p:clrMapOvr>
-  <mc:AlternateContent xmlns:mc="http://schemas.openxmlformats.org/markup-compatibility/2006" xmlns:p14="http://schemas.microsoft.com/office/powerpoint/2010/main">
-    <mc:Choice Requires="p14">
+  <mc:AlternateContent xmlns:mc="http://schemas.openxmlformats.org/markup-compatibility/2006">
+    <mc:Choice xmlns:p14="http://schemas.microsoft.com/office/powerpoint/2010/main" Requires="p14">
       <p:transition spd="med" p14:dur="700">
         <p:fade/>
       </p:transition>
     </mc:Choice>
-    <mc:Fallback xmlns="">
+    <mc:Fallback>
       <p:transition spd="med">
         <p:fade/>
       </p:transition>
@@ -5919,6 +5860,7 @@
               <a:rPr lang="zh-CN" altLang="en-US" smtClean="0"/>
               <a:t>单击此处编辑母版文本样式</a:t>
             </a:r>
+            <a:endParaRPr lang="zh-CN" altLang="en-US" smtClean="0"/>
           </a:p>
         </p:txBody>
       </p:sp>
@@ -5947,6 +5889,7 @@
               <a:rPr lang="zh-CN" altLang="en-US" smtClean="0"/>
               <a:t>单击此处编辑母版文本样式</a:t>
             </a:r>
+            <a:endParaRPr lang="zh-CN" altLang="en-US" smtClean="0"/>
           </a:p>
           <a:p>
             <a:pPr lvl="1"/>
@@ -5954,6 +5897,7 @@
               <a:rPr lang="zh-CN" altLang="en-US" smtClean="0"/>
               <a:t>第二级</a:t>
             </a:r>
+            <a:endParaRPr lang="zh-CN" altLang="en-US" smtClean="0"/>
           </a:p>
           <a:p>
             <a:pPr lvl="2"/>
@@ -5961,6 +5905,7 @@
               <a:rPr lang="zh-CN" altLang="en-US" smtClean="0"/>
               <a:t>第三级</a:t>
             </a:r>
+            <a:endParaRPr lang="zh-CN" altLang="en-US" smtClean="0"/>
           </a:p>
           <a:p>
             <a:pPr lvl="3"/>
@@ -5968,6 +5913,7 @@
               <a:rPr lang="zh-CN" altLang="en-US" smtClean="0"/>
               <a:t>第四级</a:t>
             </a:r>
+            <a:endParaRPr lang="zh-CN" altLang="en-US" smtClean="0"/>
           </a:p>
           <a:p>
             <a:pPr lvl="4"/>
@@ -6041,6 +5987,7 @@
               <a:rPr lang="zh-CN" altLang="en-US" smtClean="0"/>
               <a:t>单击此处编辑母版文本样式</a:t>
             </a:r>
+            <a:endParaRPr lang="zh-CN" altLang="en-US" smtClean="0"/>
           </a:p>
         </p:txBody>
       </p:sp>
@@ -6069,6 +6016,7 @@
               <a:rPr lang="zh-CN" altLang="en-US" smtClean="0"/>
               <a:t>单击此处编辑母版文本样式</a:t>
             </a:r>
+            <a:endParaRPr lang="zh-CN" altLang="en-US" smtClean="0"/>
           </a:p>
           <a:p>
             <a:pPr lvl="1"/>
@@ -6076,6 +6024,7 @@
               <a:rPr lang="zh-CN" altLang="en-US" smtClean="0"/>
               <a:t>第二级</a:t>
             </a:r>
+            <a:endParaRPr lang="zh-CN" altLang="en-US" smtClean="0"/>
           </a:p>
           <a:p>
             <a:pPr lvl="2"/>
@@ -6083,6 +6032,7 @@
               <a:rPr lang="zh-CN" altLang="en-US" smtClean="0"/>
               <a:t>第三级</a:t>
             </a:r>
+            <a:endParaRPr lang="zh-CN" altLang="en-US" smtClean="0"/>
           </a:p>
           <a:p>
             <a:pPr lvl="3"/>
@@ -6090,6 +6040,7 @@
               <a:rPr lang="zh-CN" altLang="en-US" smtClean="0"/>
               <a:t>第四级</a:t>
             </a:r>
+            <a:endParaRPr lang="zh-CN" altLang="en-US" smtClean="0"/>
           </a:p>
           <a:p>
             <a:pPr lvl="4"/>
@@ -6118,8 +6069,6 @@
           <a:p>
             <a:fld id="{1C3E997A-1EEE-4D88-AEC9-C83348780DB3}" type="datetime2">
               <a:rPr lang="zh-CN" altLang="en-US" smtClean="0"/>
-              <a:pPr/>
-              <a:t>2021年7月20日</a:t>
             </a:fld>
             <a:endParaRPr lang="zh-CN" altLang="en-US" dirty="0"/>
           </a:p>
@@ -6165,30 +6114,23 @@
           <a:p>
             <a:fld id="{E31375A4-56A4-47D6-9801-1991572033F7}" type="slidenum">
               <a:rPr lang="en-US" altLang="zh-CN" smtClean="0"/>
-              <a:pPr/>
-              <a:t>‹#›</a:t>
             </a:fld>
             <a:endParaRPr lang="zh-CN" altLang="en-US" dirty="0"/>
           </a:p>
         </p:txBody>
       </p:sp>
     </p:spTree>
-    <p:extLst>
-      <p:ext uri="{BB962C8B-B14F-4D97-AF65-F5344CB8AC3E}">
-        <p14:creationId xmlns:p14="http://schemas.microsoft.com/office/powerpoint/2010/main" val="81762796"/>
-      </p:ext>
-    </p:extLst>
   </p:cSld>
   <p:clrMapOvr>
     <a:masterClrMapping/>
   </p:clrMapOvr>
-  <mc:AlternateContent xmlns:mc="http://schemas.openxmlformats.org/markup-compatibility/2006" xmlns:p14="http://schemas.microsoft.com/office/powerpoint/2010/main">
-    <mc:Choice Requires="p14">
+  <mc:AlternateContent xmlns:mc="http://schemas.openxmlformats.org/markup-compatibility/2006">
+    <mc:Choice xmlns:p14="http://schemas.microsoft.com/office/powerpoint/2010/main" Requires="p14">
       <p:transition spd="med" p14:dur="700">
         <p:fade/>
       </p:transition>
     </mc:Choice>
-    <mc:Fallback xmlns="">
+    <mc:Fallback>
       <p:transition spd="med">
         <p:fade/>
       </p:transition>
@@ -6261,8 +6203,6 @@
           <a:p>
             <a:fld id="{018B8D67-B939-44AB-992D-F02AFF2C2399}" type="datetime2">
               <a:rPr lang="zh-CN" altLang="en-US" smtClean="0"/>
-              <a:pPr/>
-              <a:t>2021年7月20日</a:t>
             </a:fld>
             <a:endParaRPr lang="zh-CN" altLang="en-US" dirty="0"/>
           </a:p>
@@ -6310,30 +6250,23 @@
             <a:pPr rtl="0"/>
             <a:fld id="{E31375A4-56A4-47D6-9801-1991572033F7}" type="slidenum">
               <a:rPr lang="en-US" altLang="zh-CN" noProof="0" smtClean="0"/>
-              <a:pPr rtl="0"/>
-              <a:t>‹#›</a:t>
             </a:fld>
             <a:endParaRPr lang="zh-CN" altLang="en-US" noProof="0" dirty="0"/>
           </a:p>
         </p:txBody>
       </p:sp>
     </p:spTree>
-    <p:extLst>
-      <p:ext uri="{BB962C8B-B14F-4D97-AF65-F5344CB8AC3E}">
-        <p14:creationId xmlns:p14="http://schemas.microsoft.com/office/powerpoint/2010/main" val="3196151483"/>
-      </p:ext>
-    </p:extLst>
   </p:cSld>
   <p:clrMapOvr>
     <a:masterClrMapping/>
   </p:clrMapOvr>
-  <mc:AlternateContent xmlns:mc="http://schemas.openxmlformats.org/markup-compatibility/2006" xmlns:p14="http://schemas.microsoft.com/office/powerpoint/2010/main">
-    <mc:Choice Requires="p14">
+  <mc:AlternateContent xmlns:mc="http://schemas.openxmlformats.org/markup-compatibility/2006">
+    <mc:Choice xmlns:p14="http://schemas.microsoft.com/office/powerpoint/2010/main" Requires="p14">
       <p:transition spd="med" p14:dur="700">
         <p:fade/>
       </p:transition>
     </mc:Choice>
-    <mc:Fallback xmlns="">
+    <mc:Fallback>
       <p:transition spd="med">
         <p:fade/>
       </p:transition>
@@ -6383,8 +6316,6 @@
           <a:p>
             <a:fld id="{9F278190-531B-41DD-AD7A-47EC2C22B86C}" type="datetime2">
               <a:rPr lang="zh-CN" altLang="en-US" smtClean="0"/>
-              <a:pPr/>
-              <a:t>2021年7月20日</a:t>
             </a:fld>
             <a:endParaRPr lang="zh-CN" altLang="en-US" dirty="0"/>
           </a:p>
@@ -6432,8 +6363,6 @@
             <a:pPr rtl="0"/>
             <a:fld id="{E31375A4-56A4-47D6-9801-1991572033F7}" type="slidenum">
               <a:rPr lang="en-US" altLang="zh-CN" smtClean="0"/>
-              <a:pPr rtl="0"/>
-              <a:t>‹#›</a:t>
             </a:fld>
             <a:endParaRPr lang="zh-CN" altLang="en-US" dirty="0"/>
           </a:p>
@@ -8263,22 +8192,17 @@
         </p:grpSp>
       </p:grpSp>
     </p:spTree>
-    <p:extLst>
-      <p:ext uri="{BB962C8B-B14F-4D97-AF65-F5344CB8AC3E}">
-        <p14:creationId xmlns:p14="http://schemas.microsoft.com/office/powerpoint/2010/main" val="3758244984"/>
-      </p:ext>
-    </p:extLst>
   </p:cSld>
   <p:clrMapOvr>
     <a:masterClrMapping/>
   </p:clrMapOvr>
-  <mc:AlternateContent xmlns:mc="http://schemas.openxmlformats.org/markup-compatibility/2006" xmlns:p14="http://schemas.microsoft.com/office/powerpoint/2010/main">
-    <mc:Choice Requires="p14">
+  <mc:AlternateContent xmlns:mc="http://schemas.openxmlformats.org/markup-compatibility/2006">
+    <mc:Choice xmlns:p14="http://schemas.microsoft.com/office/powerpoint/2010/main" Requires="p14">
       <p:transition spd="med" p14:dur="700">
         <p:fade/>
       </p:transition>
     </mc:Choice>
-    <mc:Fallback xmlns="">
+    <mc:Fallback>
       <p:transition spd="med">
         <p:fade/>
       </p:transition>
@@ -8396,6 +8320,7 @@
               <a:rPr lang="zh-CN" altLang="en-US" smtClean="0"/>
               <a:t>单击此处编辑母版文本样式</a:t>
             </a:r>
+            <a:endParaRPr lang="zh-CN" altLang="en-US" smtClean="0"/>
           </a:p>
           <a:p>
             <a:pPr lvl="1"/>
@@ -8403,6 +8328,7 @@
               <a:rPr lang="zh-CN" altLang="en-US" smtClean="0"/>
               <a:t>第二级</a:t>
             </a:r>
+            <a:endParaRPr lang="zh-CN" altLang="en-US" smtClean="0"/>
           </a:p>
           <a:p>
             <a:pPr lvl="2"/>
@@ -8410,6 +8336,7 @@
               <a:rPr lang="zh-CN" altLang="en-US" smtClean="0"/>
               <a:t>第三级</a:t>
             </a:r>
+            <a:endParaRPr lang="zh-CN" altLang="en-US" smtClean="0"/>
           </a:p>
           <a:p>
             <a:pPr lvl="3"/>
@@ -8417,6 +8344,7 @@
               <a:rPr lang="zh-CN" altLang="en-US" smtClean="0"/>
               <a:t>第四级</a:t>
             </a:r>
+            <a:endParaRPr lang="zh-CN" altLang="en-US" smtClean="0"/>
           </a:p>
           <a:p>
             <a:pPr lvl="4"/>
@@ -8490,6 +8418,7 @@
               <a:rPr lang="zh-CN" altLang="en-US" smtClean="0"/>
               <a:t>单击此处编辑母版文本样式</a:t>
             </a:r>
+            <a:endParaRPr lang="zh-CN" altLang="en-US" smtClean="0"/>
           </a:p>
         </p:txBody>
       </p:sp>
@@ -8510,8 +8439,6 @@
           <a:p>
             <a:fld id="{597EE274-C014-4170-9D78-BB3EE034439F}" type="datetime2">
               <a:rPr lang="zh-CN" altLang="en-US" smtClean="0"/>
-              <a:pPr/>
-              <a:t>2021年7月20日</a:t>
             </a:fld>
             <a:endParaRPr lang="zh-CN" altLang="en-US" dirty="0"/>
           </a:p>
@@ -8557,23 +8484,28 @@
           <a:p>
             <a:fld id="{E31375A4-56A4-47D6-9801-1991572033F7}" type="slidenum">
               <a:rPr lang="en-US" altLang="zh-CN" noProof="0" smtClean="0"/>
-              <a:pPr/>
-              <a:t>‹#›</a:t>
             </a:fld>
             <a:endParaRPr lang="zh-CN" altLang="en-US" noProof="0" dirty="0"/>
           </a:p>
         </p:txBody>
       </p:sp>
     </p:spTree>
-    <p:extLst>
-      <p:ext uri="{BB962C8B-B14F-4D97-AF65-F5344CB8AC3E}">
-        <p14:creationId xmlns:p14="http://schemas.microsoft.com/office/powerpoint/2010/main" val="3023846253"/>
-      </p:ext>
-    </p:extLst>
   </p:cSld>
   <p:clrMapOvr>
     <a:masterClrMapping/>
   </p:clrMapOvr>
+  <mc:AlternateContent xmlns:mc="http://schemas.openxmlformats.org/markup-compatibility/2006">
+    <mc:Choice xmlns:p14="http://schemas.microsoft.com/office/powerpoint/2010/main" Requires="p14">
+      <p:transition spd="med" p14:dur="700">
+        <p:fade/>
+      </p:transition>
+    </mc:Choice>
+    <mc:Fallback>
+      <p:transition spd="med">
+        <p:fade/>
+      </p:transition>
+    </mc:Fallback>
+  </mc:AlternateContent>
   <p:hf hdr="0" ftr="0" dt="0"/>
 </p:sldLayout>
 </file>
@@ -8750,6 +8682,7 @@
               <a:rPr lang="zh-CN" altLang="en-US" smtClean="0"/>
               <a:t>单击此处编辑母版文本样式</a:t>
             </a:r>
+            <a:endParaRPr lang="zh-CN" altLang="en-US" smtClean="0"/>
           </a:p>
         </p:txBody>
       </p:sp>
@@ -8770,8 +8703,6 @@
           <a:p>
             <a:fld id="{597EE274-C014-4170-9D78-BB3EE034439F}" type="datetime2">
               <a:rPr lang="zh-CN" altLang="en-US" smtClean="0"/>
-              <a:pPr/>
-              <a:t>2021年7月20日</a:t>
             </a:fld>
             <a:endParaRPr lang="zh-CN" altLang="en-US" dirty="0"/>
           </a:p>
@@ -8817,23 +8748,28 @@
           <a:p>
             <a:fld id="{E31375A4-56A4-47D6-9801-1991572033F7}" type="slidenum">
               <a:rPr lang="en-US" altLang="zh-CN" noProof="0" smtClean="0"/>
-              <a:pPr/>
-              <a:t>‹#›</a:t>
             </a:fld>
             <a:endParaRPr lang="zh-CN" altLang="en-US" noProof="0" dirty="0"/>
           </a:p>
         </p:txBody>
       </p:sp>
     </p:spTree>
-    <p:extLst>
-      <p:ext uri="{BB962C8B-B14F-4D97-AF65-F5344CB8AC3E}">
-        <p14:creationId xmlns:p14="http://schemas.microsoft.com/office/powerpoint/2010/main" val="3429935826"/>
-      </p:ext>
-    </p:extLst>
   </p:cSld>
   <p:clrMapOvr>
     <a:masterClrMapping/>
   </p:clrMapOvr>
+  <mc:AlternateContent xmlns:mc="http://schemas.openxmlformats.org/markup-compatibility/2006">
+    <mc:Choice xmlns:p14="http://schemas.microsoft.com/office/powerpoint/2010/main" Requires="p14">
+      <p:transition spd="med" p14:dur="700">
+        <p:fade/>
+      </p:transition>
+    </mc:Choice>
+    <mc:Fallback>
+      <p:transition spd="med">
+        <p:fade/>
+      </p:transition>
+    </mc:Fallback>
+  </mc:AlternateContent>
   <p:hf hdr="0" ftr="0" dt="0"/>
 </p:sldLayout>
 </file>
@@ -8923,6 +8859,7 @@
               <a:rPr lang="zh-CN" altLang="en-US" smtClean="0"/>
               <a:t>单击此处编辑母版文本样式</a:t>
             </a:r>
+            <a:endParaRPr lang="zh-CN" altLang="en-US" smtClean="0"/>
           </a:p>
           <a:p>
             <a:pPr lvl="1"/>
@@ -8930,6 +8867,7 @@
               <a:rPr lang="zh-CN" altLang="en-US" smtClean="0"/>
               <a:t>第二级</a:t>
             </a:r>
+            <a:endParaRPr lang="zh-CN" altLang="en-US" smtClean="0"/>
           </a:p>
           <a:p>
             <a:pPr lvl="2"/>
@@ -8937,6 +8875,7 @@
               <a:rPr lang="zh-CN" altLang="en-US" smtClean="0"/>
               <a:t>第三级</a:t>
             </a:r>
+            <a:endParaRPr lang="zh-CN" altLang="en-US" smtClean="0"/>
           </a:p>
           <a:p>
             <a:pPr lvl="3"/>
@@ -8944,6 +8883,7 @@
               <a:rPr lang="zh-CN" altLang="en-US" smtClean="0"/>
               <a:t>第四级</a:t>
             </a:r>
+            <a:endParaRPr lang="zh-CN" altLang="en-US" smtClean="0"/>
           </a:p>
           <a:p>
             <a:pPr lvl="4"/>
@@ -8990,8 +8930,6 @@
           <a:p>
             <a:fld id="{597EE274-C014-4170-9D78-BB3EE034439F}" type="datetime2">
               <a:rPr lang="zh-CN" altLang="en-US" smtClean="0"/>
-              <a:pPr/>
-              <a:t>2021年7月20日</a:t>
             </a:fld>
             <a:endParaRPr lang="zh-CN" altLang="en-US" dirty="0"/>
           </a:p>
@@ -9073,8 +9011,6 @@
           <a:p>
             <a:fld id="{E31375A4-56A4-47D6-9801-1991572033F7}" type="slidenum">
               <a:rPr lang="en-US" altLang="zh-CN" noProof="0" smtClean="0"/>
-              <a:pPr/>
-              <a:t>‹#›</a:t>
             </a:fld>
             <a:endParaRPr lang="zh-CN" altLang="en-US" noProof="0" dirty="0"/>
           </a:p>
@@ -10949,7 +10885,7 @@
           <p:nvPr userDrawn="1"/>
         </p:nvPicPr>
         <p:blipFill>
-          <a:blip r:embed="rId13">
+          <a:blip r:embed="rId12">
             <a:extLst>
               <a:ext uri="{28A0092B-C50C-407E-A947-70E740481C1C}">
                 <a14:useLocalDpi xmlns:a14="http://schemas.microsoft.com/office/drawing/2010/main" val="0"/>
@@ -10979,7 +10915,7 @@
           <p:nvPr userDrawn="1"/>
         </p:nvPicPr>
         <p:blipFill>
-          <a:blip r:embed="rId14">
+          <a:blip r:embed="rId13">
             <a:extLst>
               <a:ext uri="{28A0092B-C50C-407E-A947-70E740481C1C}">
                 <a14:useLocalDpi xmlns:a14="http://schemas.microsoft.com/office/drawing/2010/main" val="0"/>
@@ -11012,33 +10948,28 @@
         </p:spPr>
       </p:pic>
     </p:spTree>
-    <p:extLst>
-      <p:ext uri="{BB962C8B-B14F-4D97-AF65-F5344CB8AC3E}">
-        <p14:creationId xmlns:p14="http://schemas.microsoft.com/office/powerpoint/2010/main" val="1754804598"/>
-      </p:ext>
-    </p:extLst>
   </p:cSld>
   <p:clrMap bg1="lt1" tx1="dk1" bg2="lt2" tx2="dk2" accent1="accent1" accent2="accent2" accent3="accent3" accent4="accent4" accent5="accent5" accent6="accent6" hlink="hlink" folHlink="folHlink"/>
   <p:sldLayoutIdLst>
-    <p:sldLayoutId id="2147483671" r:id="rId1"/>
-    <p:sldLayoutId id="2147483672" r:id="rId2"/>
-    <p:sldLayoutId id="2147483673" r:id="rId3"/>
-    <p:sldLayoutId id="2147483674" r:id="rId4"/>
-    <p:sldLayoutId id="2147483675" r:id="rId5"/>
-    <p:sldLayoutId id="2147483676" r:id="rId6"/>
-    <p:sldLayoutId id="2147483677" r:id="rId7"/>
-    <p:sldLayoutId id="2147483678" r:id="rId8"/>
-    <p:sldLayoutId id="2147483679" r:id="rId9"/>
-    <p:sldLayoutId id="2147483680" r:id="rId10"/>
-    <p:sldLayoutId id="2147483681" r:id="rId11"/>
+    <p:sldLayoutId id="2147483649" r:id="rId1"/>
+    <p:sldLayoutId id="2147483650" r:id="rId2"/>
+    <p:sldLayoutId id="2147483651" r:id="rId3"/>
+    <p:sldLayoutId id="2147483652" r:id="rId4"/>
+    <p:sldLayoutId id="2147483653" r:id="rId5"/>
+    <p:sldLayoutId id="2147483654" r:id="rId6"/>
+    <p:sldLayoutId id="2147483655" r:id="rId7"/>
+    <p:sldLayoutId id="2147483656" r:id="rId8"/>
+    <p:sldLayoutId id="2147483657" r:id="rId9"/>
+    <p:sldLayoutId id="2147483658" r:id="rId10"/>
+    <p:sldLayoutId id="2147483659" r:id="rId11"/>
   </p:sldLayoutIdLst>
-  <mc:AlternateContent xmlns:mc="http://schemas.openxmlformats.org/markup-compatibility/2006" xmlns:p14="http://schemas.microsoft.com/office/powerpoint/2010/main">
-    <mc:Choice Requires="p14">
+  <mc:AlternateContent xmlns:mc="http://schemas.openxmlformats.org/markup-compatibility/2006">
+    <mc:Choice xmlns:p14="http://schemas.microsoft.com/office/powerpoint/2010/main" Requires="p14">
       <p:transition spd="med" p14:dur="700">
         <p:fade/>
       </p:transition>
     </mc:Choice>
-    <mc:Fallback xmlns="">
+    <mc:Fallback>
       <p:transition spd="med">
         <p:fade/>
       </p:transition>
@@ -11080,7 +11011,7 @@
         <a:spcBef>
           <a:spcPts val="1000"/>
         </a:spcBef>
-        <a:buFont typeface="Arial" panose="020B0604020202020204" pitchFamily="34" charset="0"/>
+        <a:buFont typeface="Arial" panose="020B0604020202090204" pitchFamily="34" charset="0"/>
         <a:buChar char="•"/>
         <a:defRPr sz="2800" kern="1200">
           <a:solidFill>
@@ -11098,7 +11029,7 @@
         <a:spcBef>
           <a:spcPts val="500"/>
         </a:spcBef>
-        <a:buFont typeface="Arial" panose="020B0604020202020204" pitchFamily="34" charset="0"/>
+        <a:buFont typeface="Arial" panose="020B0604020202090204" pitchFamily="34" charset="0"/>
         <a:buChar char="•"/>
         <a:defRPr sz="2400" kern="1200">
           <a:solidFill>
@@ -11116,7 +11047,7 @@
         <a:spcBef>
           <a:spcPts val="500"/>
         </a:spcBef>
-        <a:buFont typeface="Arial" panose="020B0604020202020204" pitchFamily="34" charset="0"/>
+        <a:buFont typeface="Arial" panose="020B0604020202090204" pitchFamily="34" charset="0"/>
         <a:buChar char="•"/>
         <a:defRPr sz="2000" kern="1200">
           <a:solidFill>
@@ -11134,7 +11065,7 @@
         <a:spcBef>
           <a:spcPts val="500"/>
         </a:spcBef>
-        <a:buFont typeface="Arial" panose="020B0604020202020204" pitchFamily="34" charset="0"/>
+        <a:buFont typeface="Arial" panose="020B0604020202090204" pitchFamily="34" charset="0"/>
         <a:buChar char="•"/>
         <a:defRPr sz="1800" kern="1200">
           <a:solidFill>
@@ -11152,7 +11083,7 @@
         <a:spcBef>
           <a:spcPts val="500"/>
         </a:spcBef>
-        <a:buFont typeface="Arial" panose="020B0604020202020204" pitchFamily="34" charset="0"/>
+        <a:buFont typeface="Arial" panose="020B0604020202090204" pitchFamily="34" charset="0"/>
         <a:buChar char="•"/>
         <a:defRPr sz="1800" kern="1200">
           <a:solidFill>
@@ -11170,7 +11101,7 @@
         <a:spcBef>
           <a:spcPts val="500"/>
         </a:spcBef>
-        <a:buFont typeface="Arial" panose="020B0604020202020204" pitchFamily="34" charset="0"/>
+        <a:buFont typeface="Arial" panose="020B0604020202090204" pitchFamily="34" charset="0"/>
         <a:buChar char="•"/>
         <a:defRPr sz="1800" kern="1200">
           <a:solidFill>
@@ -11188,7 +11119,7 @@
         <a:spcBef>
           <a:spcPts val="500"/>
         </a:spcBef>
-        <a:buFont typeface="Arial" panose="020B0604020202020204" pitchFamily="34" charset="0"/>
+        <a:buFont typeface="Arial" panose="020B0604020202090204" pitchFamily="34" charset="0"/>
         <a:buChar char="•"/>
         <a:defRPr sz="1800" kern="1200">
           <a:solidFill>
@@ -11206,7 +11137,7 @@
         <a:spcBef>
           <a:spcPts val="500"/>
         </a:spcBef>
-        <a:buFont typeface="Arial" panose="020B0604020202020204" pitchFamily="34" charset="0"/>
+        <a:buFont typeface="Arial" panose="020B0604020202090204" pitchFamily="34" charset="0"/>
         <a:buChar char="•"/>
         <a:defRPr sz="1800" kern="1200">
           <a:solidFill>
@@ -11224,7 +11155,7 @@
         <a:spcBef>
           <a:spcPts val="500"/>
         </a:spcBef>
-        <a:buFont typeface="Arial" panose="020B0604020202020204" pitchFamily="34" charset="0"/>
+        <a:buFont typeface="Arial" panose="020B0604020202090204" pitchFamily="34" charset="0"/>
         <a:buChar char="•"/>
         <a:defRPr sz="1800" kern="1200">
           <a:solidFill>
@@ -11332,22 +11263,6 @@
       </a:lvl9pPr>
     </p:otherStyle>
   </p:txStyles>
-  <p:extLst>
-    <p:ext uri="{27BBF7A9-308A-43DC-89C8-2F10F3537804}">
-      <p15:sldGuideLst xmlns:p15="http://schemas.microsoft.com/office/powerpoint/2012/main">
-        <p15:guide id="1" orient="horz" pos="2160" userDrawn="1">
-          <p15:clr>
-            <a:srgbClr val="F26B43"/>
-          </p15:clr>
-        </p15:guide>
-        <p15:guide id="2" pos="3840" userDrawn="1">
-          <p15:clr>
-            <a:srgbClr val="F26B43"/>
-          </p15:clr>
-        </p15:guide>
-      </p15:sldGuideLst>
-    </p:ext>
-  </p:extLst>
 </p:sldMaster>
 </file>
 
@@ -11395,14 +11310,14 @@
               <a:rPr lang="zh-CN" altLang="en-US" sz="2000" b="1" dirty="0" smtClean="0">
                 <a:latin typeface="Microsoft JhengHei UI" pitchFamily="34" charset="-120"/>
                 <a:ea typeface="Microsoft JhengHei UI" pitchFamily="34" charset="-120"/>
-                <a:sym typeface="Arial" panose="020B0604020202020204" pitchFamily="34" charset="0"/>
+                <a:sym typeface="Arial" panose="020B0604020202090204" pitchFamily="34" charset="0"/>
               </a:rPr>
               <a:t>編寫說明：</a:t>
             </a:r>
             <a:endParaRPr lang="zh-CN" altLang="en-US" sz="2000" b="1" dirty="0">
               <a:latin typeface="Microsoft JhengHei UI" pitchFamily="34" charset="-120"/>
               <a:ea typeface="Microsoft JhengHei UI" pitchFamily="34" charset="-120"/>
-              <a:sym typeface="Arial" panose="020B0604020202020204" pitchFamily="34" charset="0"/>
+              <a:sym typeface="Arial" panose="020B0604020202090204" pitchFamily="34" charset="0"/>
             </a:endParaRPr>
           </a:p>
         </p:txBody>
@@ -11413,13 +11328,7 @@
           <p:cNvGraphicFramePr>
             <a:graphicFrameLocks noGrp="1"/>
           </p:cNvGraphicFramePr>
-          <p:nvPr>
-            <p:extLst>
-              <p:ext uri="{D42A27DB-BD31-4B8C-83A1-F6EECF244321}">
-                <p14:modId xmlns:p14="http://schemas.microsoft.com/office/powerpoint/2010/main" val="1225231472"/>
-              </p:ext>
-            </p:extLst>
-          </p:nvPr>
+          <p:nvPr/>
         </p:nvGraphicFramePr>
         <p:xfrm>
           <a:off x="1452948" y="1480742"/>
@@ -11546,7 +11455,6 @@
                         <a:buSzTx/>
                         <a:buFontTx/>
                         <a:buNone/>
-                        <a:tabLst/>
                         <a:defRPr/>
                       </a:pPr>
                       <a:r>
@@ -11556,7 +11464,7 @@
                           </a:solidFill>
                           <a:latin typeface="Microsoft JhengHei UI" pitchFamily="34" charset="-120"/>
                           <a:ea typeface="Microsoft JhengHei UI" pitchFamily="34" charset="-120"/>
-                          <a:sym typeface="Arial" panose="020B0604020202020204" pitchFamily="34" charset="0"/>
+                          <a:sym typeface="Arial" panose="020B0604020202090204" pitchFamily="34" charset="0"/>
                         </a:rPr>
                         <a:t>1.</a:t>
                       </a:r>
@@ -11567,7 +11475,7 @@
                           </a:solidFill>
                           <a:latin typeface="Microsoft JhengHei UI" pitchFamily="34" charset="-120"/>
                           <a:ea typeface="Microsoft JhengHei UI" pitchFamily="34" charset="-120"/>
-                          <a:sym typeface="Arial" panose="020B0604020202020204" pitchFamily="34" charset="0"/>
+                          <a:sym typeface="Arial" panose="020B0604020202090204" pitchFamily="34" charset="0"/>
                         </a:rPr>
                         <a:t>報告必須包括每個能力要素，不能有缺失，呈現形式不限</a:t>
                       </a:r>
@@ -11577,7 +11485,7 @@
                         </a:solidFill>
                         <a:latin typeface="Microsoft JhengHei UI" pitchFamily="34" charset="-120"/>
                         <a:ea typeface="Microsoft JhengHei UI" pitchFamily="34" charset="-120"/>
-                        <a:sym typeface="Arial" panose="020B0604020202020204" pitchFamily="34" charset="0"/>
+                        <a:sym typeface="Arial" panose="020B0604020202090204" pitchFamily="34" charset="0"/>
                       </a:endParaRPr>
                     </a:p>
                     <a:p>
@@ -11595,7 +11503,6 @@
                         <a:buSzTx/>
                         <a:buFontTx/>
                         <a:buNone/>
-                        <a:tabLst/>
                         <a:defRPr/>
                       </a:pPr>
                       <a:r>
@@ -11605,7 +11512,7 @@
                           </a:solidFill>
                           <a:latin typeface="Microsoft JhengHei UI" pitchFamily="34" charset="-120"/>
                           <a:ea typeface="Microsoft JhengHei UI" pitchFamily="34" charset="-120"/>
-                          <a:sym typeface="Arial" panose="020B0604020202020204" pitchFamily="34" charset="0"/>
+                          <a:sym typeface="Arial" panose="020B0604020202090204" pitchFamily="34" charset="0"/>
                         </a:rPr>
                         <a:t>2.</a:t>
                       </a:r>
@@ -11616,7 +11523,7 @@
                           </a:solidFill>
                           <a:latin typeface="Microsoft JhengHei UI" pitchFamily="34" charset="-120"/>
                           <a:ea typeface="Microsoft JhengHei UI" pitchFamily="34" charset="-120"/>
-                          <a:sym typeface="Arial" panose="020B0604020202020204" pitchFamily="34" charset="0"/>
+                          <a:sym typeface="Arial" panose="020B0604020202090204" pitchFamily="34" charset="0"/>
                         </a:rPr>
                         <a:t>語言簡練，避免過多的文字描述</a:t>
                       </a:r>
@@ -11626,7 +11533,7 @@
                         </a:solidFill>
                         <a:latin typeface="Microsoft JhengHei UI" pitchFamily="34" charset="-120"/>
                         <a:ea typeface="Microsoft JhengHei UI" pitchFamily="34" charset="-120"/>
-                        <a:sym typeface="Arial" panose="020B0604020202020204" pitchFamily="34" charset="0"/>
+                        <a:sym typeface="Arial" panose="020B0604020202090204" pitchFamily="34" charset="0"/>
                       </a:endParaRPr>
                     </a:p>
                     <a:p>
@@ -11644,7 +11551,6 @@
                         <a:buSzTx/>
                         <a:buFontTx/>
                         <a:buNone/>
-                        <a:tabLst/>
                         <a:defRPr/>
                       </a:pPr>
                       <a:r>
@@ -11654,7 +11560,7 @@
                           </a:solidFill>
                           <a:latin typeface="Microsoft JhengHei UI" pitchFamily="34" charset="-120"/>
                           <a:ea typeface="Microsoft JhengHei UI" pitchFamily="34" charset="-120"/>
-                          <a:sym typeface="Arial" panose="020B0604020202020204" pitchFamily="34" charset="0"/>
+                          <a:sym typeface="Arial" panose="020B0604020202090204" pitchFamily="34" charset="0"/>
                         </a:rPr>
                         <a:t>3.</a:t>
                       </a:r>
@@ -11665,7 +11571,7 @@
                           </a:solidFill>
                           <a:latin typeface="Microsoft JhengHei UI" pitchFamily="34" charset="-120"/>
                           <a:ea typeface="Microsoft JhengHei UI" pitchFamily="34" charset="-120"/>
-                          <a:sym typeface="Arial" panose="020B0604020202020204" pitchFamily="34" charset="0"/>
+                          <a:sym typeface="Arial" panose="020B0604020202090204" pitchFamily="34" charset="0"/>
                         </a:rPr>
                         <a:t>結構清晰，證據確著，以實例、數據等作為舉證材料</a:t>
                       </a:r>
@@ -11675,7 +11581,7 @@
                         </a:solidFill>
                         <a:latin typeface="Microsoft JhengHei UI" pitchFamily="34" charset="-120"/>
                         <a:ea typeface="Microsoft JhengHei UI" pitchFamily="34" charset="-120"/>
-                        <a:sym typeface="Arial" panose="020B0604020202020204" pitchFamily="34" charset="0"/>
+                        <a:sym typeface="Arial" panose="020B0604020202090204" pitchFamily="34" charset="0"/>
                       </a:endParaRPr>
                     </a:p>
                     <a:p>
@@ -11693,7 +11599,6 @@
                         <a:buSzTx/>
                         <a:buFontTx/>
                         <a:buNone/>
-                        <a:tabLst/>
                         <a:defRPr/>
                       </a:pPr>
                       <a:r>
@@ -11703,7 +11608,7 @@
                           </a:solidFill>
                           <a:latin typeface="Microsoft JhengHei UI" pitchFamily="34" charset="-120"/>
                           <a:ea typeface="Microsoft JhengHei UI" pitchFamily="34" charset="-120"/>
-                          <a:sym typeface="Arial" panose="020B0604020202020204" pitchFamily="34" charset="0"/>
+                          <a:sym typeface="Arial" panose="020B0604020202090204" pitchFamily="34" charset="0"/>
                         </a:rPr>
                         <a:t>4.</a:t>
                       </a:r>
@@ -11714,7 +11619,7 @@
                           </a:solidFill>
                           <a:latin typeface="Microsoft JhengHei UI" pitchFamily="34" charset="-120"/>
                           <a:ea typeface="Microsoft JhengHei UI" pitchFamily="34" charset="-120"/>
-                          <a:sym typeface="Arial" panose="020B0604020202020204" pitchFamily="34" charset="0"/>
+                          <a:sym typeface="Arial" panose="020B0604020202090204" pitchFamily="34" charset="0"/>
                         </a:rPr>
                         <a:t>舉證材料可另外附件。</a:t>
                       </a:r>
@@ -11782,9 +11687,7 @@
       <p:sp>
         <p:nvSpPr>
           <p:cNvPr id="5" name="标题 1"/>
-          <p:cNvSpPr txBox="1">
-            <a:spLocks/>
-          </p:cNvSpPr>
+          <p:cNvSpPr txBox="1"/>
           <p:nvPr/>
         </p:nvSpPr>
         <p:spPr>
@@ -11830,7 +11733,7 @@
                 </a:solidFill>
                 <a:latin typeface="Microsoft JhengHei UI" pitchFamily="34" charset="-120"/>
                 <a:ea typeface="Microsoft JhengHei UI" pitchFamily="34" charset="-120"/>
-                <a:sym typeface="Arial" panose="020B0604020202020204" pitchFamily="34" charset="0"/>
+                <a:sym typeface="Arial" panose="020B0604020202090204" pitchFamily="34" charset="0"/>
               </a:rPr>
               <a:t>中原資訊總處技術職認證答辯報告</a:t>
             </a:r>
@@ -11842,7 +11745,7 @@
               </a:solidFill>
               <a:latin typeface="Microsoft JhengHei UI" pitchFamily="34" charset="-120"/>
               <a:ea typeface="Microsoft JhengHei UI" pitchFamily="34" charset="-120"/>
-              <a:sym typeface="Arial" panose="020B0604020202020204" pitchFamily="34" charset="0"/>
+              <a:sym typeface="Arial" panose="020B0604020202090204" pitchFamily="34" charset="0"/>
             </a:endParaRPr>
           </a:p>
         </p:txBody>
@@ -11850,9 +11753,7 @@
       <p:sp>
         <p:nvSpPr>
           <p:cNvPr id="7" name="标题 1"/>
-          <p:cNvSpPr txBox="1">
-            <a:spLocks/>
-          </p:cNvSpPr>
+          <p:cNvSpPr txBox="1"/>
           <p:nvPr/>
         </p:nvSpPr>
         <p:spPr>
@@ -11884,7 +11785,6 @@
               <a:buSzTx/>
               <a:buFontTx/>
               <a:buNone/>
-              <a:tabLst/>
               <a:defRPr/>
             </a:pPr>
             <a:r>
@@ -11901,7 +11801,7 @@
                 <a:latin typeface="Microsoft JhengHei UI" pitchFamily="34" charset="-120"/>
                 <a:ea typeface="Microsoft JhengHei UI" pitchFamily="34" charset="-120"/>
                 <a:cs typeface="+mj-cs"/>
-                <a:sym typeface="Arial" panose="020B0604020202020204" pitchFamily="34" charset="0"/>
+                <a:sym typeface="Arial" panose="020B0604020202090204" pitchFamily="34" charset="0"/>
               </a:rPr>
               <a:t>能力要求：</a:t>
             </a:r>
@@ -11918,7 +11818,7 @@
               <a:latin typeface="Microsoft JhengHei UI" pitchFamily="34" charset="-120"/>
               <a:ea typeface="Microsoft JhengHei UI" pitchFamily="34" charset="-120"/>
               <a:cs typeface="+mj-cs"/>
-              <a:sym typeface="Arial" panose="020B0604020202020204" pitchFamily="34" charset="0"/>
+              <a:sym typeface="Arial" panose="020B0604020202090204" pitchFamily="34" charset="0"/>
             </a:endParaRPr>
           </a:p>
         </p:txBody>
@@ -11929,13 +11829,7 @@
           <p:cNvGraphicFramePr>
             <a:graphicFrameLocks noGrp="1"/>
           </p:cNvGraphicFramePr>
-          <p:nvPr>
-            <p:extLst>
-              <p:ext uri="{D42A27DB-BD31-4B8C-83A1-F6EECF244321}">
-                <p14:modId xmlns:p14="http://schemas.microsoft.com/office/powerpoint/2010/main" val="2670580465"/>
-              </p:ext>
-            </p:extLst>
-          </p:nvPr>
+          <p:nvPr/>
         </p:nvGraphicFramePr>
         <p:xfrm>
           <a:off x="2587626" y="2537884"/>
@@ -11968,6 +11862,13 @@
                         </a:rPr>
                         <a:t>能力項</a:t>
                       </a:r>
+                      <a:endParaRPr lang="zh-TW" altLang="en-US" sz="1050" b="0" i="0" u="none" strike="noStrike" dirty="0">
+                        <a:solidFill>
+                          <a:srgbClr val="000000"/>
+                        </a:solidFill>
+                        <a:latin typeface="Microsoft JhengHei UI" pitchFamily="34" charset="-120"/>
+                        <a:ea typeface="Microsoft JhengHei UI" pitchFamily="34" charset="-120"/>
+                      </a:endParaRPr>
                     </a:p>
                   </a:txBody>
                   <a:tcPr marL="0" marR="0" marT="0" marB="0" anchor="ctr">
@@ -12025,6 +11926,13 @@
                         </a:rPr>
                         <a:t>能力描述</a:t>
                       </a:r>
+                      <a:endParaRPr lang="zh-TW" altLang="en-US" sz="1050" b="0" i="0" u="none" strike="noStrike" dirty="0">
+                        <a:solidFill>
+                          <a:srgbClr val="000000"/>
+                        </a:solidFill>
+                        <a:latin typeface="Microsoft JhengHei UI" pitchFamily="34" charset="-120"/>
+                        <a:ea typeface="Microsoft JhengHei UI" pitchFamily="34" charset="-120"/>
+                      </a:endParaRPr>
                     </a:p>
                   </a:txBody>
                   <a:tcPr marL="0" marR="0" marT="0" marB="0" anchor="ctr">
@@ -12082,6 +11990,13 @@
                         </a:rPr>
                         <a:t>2-1</a:t>
                       </a:r>
+                      <a:endParaRPr lang="en-US" altLang="zh-TW" sz="1000" b="0" i="0" u="none" strike="noStrike" dirty="0" smtClean="0">
+                        <a:solidFill>
+                          <a:srgbClr val="000000"/>
+                        </a:solidFill>
+                        <a:latin typeface="Microsoft JhengHei UI" pitchFamily="34" charset="-120"/>
+                        <a:ea typeface="Microsoft JhengHei UI" pitchFamily="34" charset="-120"/>
+                      </a:endParaRPr>
                     </a:p>
                     <a:p>
                       <a:pPr algn="ctr" fontAlgn="ctr"/>
@@ -12159,6 +12074,13 @@
                         </a:rPr>
                         <a:t>2-2</a:t>
                       </a:r>
+                      <a:endParaRPr lang="en-US" altLang="zh-TW" sz="1000" b="0" i="0" u="none" strike="noStrike" dirty="0" smtClean="0">
+                        <a:solidFill>
+                          <a:srgbClr val="000000"/>
+                        </a:solidFill>
+                        <a:latin typeface="Microsoft JhengHei UI" pitchFamily="34" charset="-120"/>
+                        <a:ea typeface="Microsoft JhengHei UI" pitchFamily="34" charset="-120"/>
+                      </a:endParaRPr>
                     </a:p>
                     <a:p>
                       <a:pPr algn="ctr" fontAlgn="ctr"/>
@@ -12312,6 +12234,13 @@
                         </a:rPr>
                         <a:t>①熟悉所使用的主要技術，能够独立分析、快速排查和解決問題</a:t>
                       </a:r>
+                      <a:endParaRPr lang="zh-TW" altLang="en-US" sz="1100" b="0" i="0" u="none" strike="noStrike" dirty="0" smtClean="0">
+                        <a:solidFill>
+                          <a:srgbClr val="000000"/>
+                        </a:solidFill>
+                        <a:latin typeface="Microsoft JhengHei UI" pitchFamily="34" charset="-120"/>
+                        <a:ea typeface="Microsoft JhengHei UI" pitchFamily="34" charset="-120"/>
+                      </a:endParaRPr>
                     </a:p>
                     <a:p>
                       <a:pPr algn="l" fontAlgn="ctr"/>
@@ -12325,6 +12254,13 @@
                         </a:rPr>
                         <a:t>②某一專業領域比較精通，具有一定權威，具备辅导他人的能力和技能</a:t>
                       </a:r>
+                      <a:endParaRPr lang="zh-TW" altLang="en-US" sz="1100" b="0" i="0" u="none" strike="noStrike" dirty="0" smtClean="0">
+                        <a:solidFill>
+                          <a:srgbClr val="000000"/>
+                        </a:solidFill>
+                        <a:latin typeface="Microsoft JhengHei UI" pitchFamily="34" charset="-120"/>
+                        <a:ea typeface="Microsoft JhengHei UI" pitchFamily="34" charset="-120"/>
+                      </a:endParaRPr>
                     </a:p>
                     <a:p>
                       <a:pPr algn="l" fontAlgn="ctr"/>
@@ -12596,6 +12532,13 @@
                         </a:rPr>
                         <a:t>①深入瞭解行業趨勢，掌握前沿知識和方法，業界成功經驗和最佳實踐案例</a:t>
                       </a:r>
+                      <a:endParaRPr lang="zh-TW" altLang="en-US" sz="1100" b="0" i="0" u="none" strike="noStrike" dirty="0" smtClean="0">
+                        <a:solidFill>
+                          <a:srgbClr val="000000"/>
+                        </a:solidFill>
+                        <a:latin typeface="Microsoft JhengHei UI" pitchFamily="34" charset="-120"/>
+                        <a:ea typeface="Microsoft JhengHei UI" pitchFamily="34" charset="-120"/>
+                      </a:endParaRPr>
                     </a:p>
                     <a:p>
                       <a:pPr algn="l" fontAlgn="ctr"/>
@@ -12609,6 +12552,13 @@
                         </a:rPr>
                         <a:t>②結合業務實際成功導入有價值的技術，并在組織內部推廣適用</a:t>
                       </a:r>
+                      <a:endParaRPr lang="zh-TW" altLang="en-US" sz="1100" b="0" i="0" u="none" strike="noStrike" dirty="0" smtClean="0">
+                        <a:solidFill>
+                          <a:srgbClr val="000000"/>
+                        </a:solidFill>
+                        <a:latin typeface="Microsoft JhengHei UI" pitchFamily="34" charset="-120"/>
+                        <a:ea typeface="Microsoft JhengHei UI" pitchFamily="34" charset="-120"/>
+                      </a:endParaRPr>
                     </a:p>
                     <a:p>
                       <a:pPr algn="l" fontAlgn="ctr"/>
@@ -12880,6 +12830,13 @@
                         </a:rPr>
                         <a:t>①專案资源配置與運用：有效控制專案成本，利用最少的成本實現最大效益</a:t>
                       </a:r>
+                      <a:endParaRPr lang="zh-TW" altLang="en-US" sz="1100" b="0" i="0" u="none" strike="noStrike" dirty="0" smtClean="0">
+                        <a:solidFill>
+                          <a:srgbClr val="000000"/>
+                        </a:solidFill>
+                        <a:latin typeface="Microsoft JhengHei UI" pitchFamily="34" charset="-120"/>
+                        <a:ea typeface="Microsoft JhengHei UI" pitchFamily="34" charset="-120"/>
+                      </a:endParaRPr>
                     </a:p>
                     <a:p>
                       <a:pPr algn="l" fontAlgn="ctr"/>
@@ -12893,6 +12850,13 @@
                         </a:rPr>
                         <a:t>②專案時程掌控：進行有效合理分解及優先級排序，確保專案按期交付</a:t>
                       </a:r>
+                      <a:endParaRPr lang="zh-TW" altLang="en-US" sz="1100" b="0" i="0" u="none" strike="noStrike" dirty="0" smtClean="0">
+                        <a:solidFill>
+                          <a:srgbClr val="000000"/>
+                        </a:solidFill>
+                        <a:latin typeface="Microsoft JhengHei UI" pitchFamily="34" charset="-120"/>
+                        <a:ea typeface="Microsoft JhengHei UI" pitchFamily="34" charset="-120"/>
+                      </a:endParaRPr>
                     </a:p>
                     <a:p>
                       <a:pPr algn="l" fontAlgn="ctr"/>
@@ -12906,6 +12870,13 @@
                         </a:rPr>
                         <a:t>③專案風險評估：能有針對性的制定風險應對措施，有效控制風險</a:t>
                       </a:r>
+                      <a:endParaRPr lang="zh-TW" altLang="en-US" sz="1100" b="0" i="0" u="none" strike="noStrike" dirty="0" smtClean="0">
+                        <a:solidFill>
+                          <a:srgbClr val="000000"/>
+                        </a:solidFill>
+                        <a:latin typeface="Microsoft JhengHei UI" pitchFamily="34" charset="-120"/>
+                        <a:ea typeface="Microsoft JhengHei UI" pitchFamily="34" charset="-120"/>
+                      </a:endParaRPr>
                     </a:p>
                     <a:p>
                       <a:pPr algn="l" fontAlgn="ctr"/>
@@ -13177,6 +13148,13 @@
                         </a:rPr>
                         <a:t>①能結合員工績效、技術能力特點，制定針對性的培養計劃幷指導實施</a:t>
                       </a:r>
+                      <a:endParaRPr lang="zh-TW" altLang="en-US" sz="1100" b="0" i="0" u="none" strike="noStrike" dirty="0" smtClean="0">
+                        <a:solidFill>
+                          <a:srgbClr val="000000"/>
+                        </a:solidFill>
+                        <a:latin typeface="Microsoft JhengHei UI" pitchFamily="34" charset="-120"/>
+                        <a:ea typeface="Microsoft JhengHei UI" pitchFamily="34" charset="-120"/>
+                      </a:endParaRPr>
                     </a:p>
                     <a:p>
                       <a:pPr algn="l" fontAlgn="ctr"/>
@@ -13190,6 +13168,13 @@
                         </a:rPr>
                         <a:t>②履行導師職責，做好團隊教練，及時輔導，合理授權</a:t>
                       </a:r>
+                      <a:endParaRPr lang="zh-TW" altLang="en-US" sz="1100" b="0" i="0" u="none" strike="noStrike" dirty="0" smtClean="0">
+                        <a:solidFill>
+                          <a:srgbClr val="000000"/>
+                        </a:solidFill>
+                        <a:latin typeface="Microsoft JhengHei UI" pitchFamily="34" charset="-120"/>
+                        <a:ea typeface="Microsoft JhengHei UI" pitchFamily="34" charset="-120"/>
+                      </a:endParaRPr>
                     </a:p>
                     <a:p>
                       <a:pPr algn="l" fontAlgn="ctr"/>
@@ -13334,7 +13319,6 @@
                         <a:buSzTx/>
                         <a:buFontTx/>
                         <a:buNone/>
-                        <a:tabLst/>
                         <a:defRPr/>
                       </a:pPr>
                       <a:r>
@@ -13423,16 +13407,6 @@
                         </a:rPr>
                         <a:t>：</a:t>
                       </a:r>
-                      <a:r>
-                        <a:rPr lang="zh-TW" altLang="en-US" sz="1050" b="0" i="0" u="none" strike="noStrike" dirty="0">
-                          <a:solidFill>
-                            <a:srgbClr val="000000"/>
-                          </a:solidFill>
-                          <a:latin typeface="Microsoft JhengHei UI" pitchFamily="34" charset="-120"/>
-                          <a:ea typeface="Microsoft JhengHei UI" pitchFamily="34" charset="-120"/>
-                        </a:rPr>
-                        <a:t/>
-                      </a:r>
                       <a:br>
                         <a:rPr lang="zh-TW" altLang="en-US" sz="1050" b="0" i="0" u="none" strike="noStrike" dirty="0">
                           <a:solidFill>
@@ -13462,6 +13436,13 @@
                         </a:rPr>
                         <a:t>水平高，完全可以成爲他人學習的楷模 </a:t>
                       </a:r>
+                      <a:endParaRPr lang="zh-TW" altLang="en-US" sz="1050" b="0" i="0" u="none" strike="noStrike" dirty="0" smtClean="0">
+                        <a:solidFill>
+                          <a:srgbClr val="000000"/>
+                        </a:solidFill>
+                        <a:latin typeface="Microsoft JhengHei UI" pitchFamily="34" charset="-120"/>
+                        <a:ea typeface="Microsoft JhengHei UI" pitchFamily="34" charset="-120"/>
+                      </a:endParaRPr>
                     </a:p>
                     <a:p>
                       <a:pPr algn="l" fontAlgn="ctr"/>
@@ -13564,33 +13545,12 @@
                   </a:tcPr>
                 </a:tc>
                 <a:tc hMerge="1">
-                  <a:txBody>
-                    <a:bodyPr/>
-                    <a:lstStyle/>
-                    <a:p>
-                      <a:endParaRPr lang="zh-TW" altLang="en-US"/>
-                    </a:p>
-                  </a:txBody>
                   <a:tcPr/>
                 </a:tc>
                 <a:tc hMerge="1">
-                  <a:txBody>
-                    <a:bodyPr/>
-                    <a:lstStyle/>
-                    <a:p>
-                      <a:endParaRPr lang="zh-TW" altLang="en-US"/>
-                    </a:p>
-                  </a:txBody>
                   <a:tcPr/>
                 </a:tc>
                 <a:tc hMerge="1">
-                  <a:txBody>
-                    <a:bodyPr/>
-                    <a:lstStyle/>
-                    <a:p>
-                      <a:endParaRPr lang="zh-TW" altLang="en-US"/>
-                    </a:p>
-                  </a:txBody>
                   <a:tcPr/>
                 </a:tc>
               </a:tr>
@@ -13599,22 +13559,17 @@
         </a:graphic>
       </p:graphicFrame>
     </p:spTree>
-    <p:extLst>
-      <p:ext uri="{BB962C8B-B14F-4D97-AF65-F5344CB8AC3E}">
-        <p14:creationId xmlns:p14="http://schemas.microsoft.com/office/powerpoint/2010/main" val="3984617762"/>
-      </p:ext>
-    </p:extLst>
   </p:cSld>
   <p:clrMapOvr>
     <a:masterClrMapping/>
   </p:clrMapOvr>
-  <mc:AlternateContent xmlns:mc="http://schemas.openxmlformats.org/markup-compatibility/2006" xmlns:p14="http://schemas.microsoft.com/office/powerpoint/2010/main">
-    <mc:Choice Requires="p14">
+  <mc:AlternateContent xmlns:mc="http://schemas.openxmlformats.org/markup-compatibility/2006">
+    <mc:Choice xmlns:p14="http://schemas.microsoft.com/office/powerpoint/2010/main" Requires="p14">
       <p:transition spd="med" p14:dur="700">
         <p:fade/>
       </p:transition>
     </mc:Choice>
-    <mc:Fallback xmlns="">
+    <mc:Fallback>
       <p:transition spd="med">
         <p:fade/>
       </p:transition>
@@ -13653,13 +13608,7 @@
           <p:cNvGraphicFramePr>
             <a:graphicFrameLocks noGrp="1"/>
           </p:cNvGraphicFramePr>
-          <p:nvPr>
-            <p:extLst>
-              <p:ext uri="{D42A27DB-BD31-4B8C-83A1-F6EECF244321}">
-                <p14:modId xmlns:p14="http://schemas.microsoft.com/office/powerpoint/2010/main" val="2531418125"/>
-              </p:ext>
-            </p:extLst>
-          </p:nvPr>
+          <p:nvPr/>
         </p:nvGraphicFramePr>
         <p:xfrm>
           <a:off x="1031363" y="1463314"/>
@@ -13692,11 +13641,18 @@
                           <a:solidFill>
                             <a:srgbClr val="000000"/>
                           </a:solidFill>
-                          <a:latin typeface="微软雅黑" pitchFamily="34" charset="-122"/>
-                          <a:ea typeface="微软雅黑" pitchFamily="34" charset="-122"/>
+                          <a:latin typeface="微软雅黑" panose="020B0503020204020204" pitchFamily="34" charset="-122"/>
+                          <a:ea typeface="微软雅黑" panose="020B0503020204020204" pitchFamily="34" charset="-122"/>
                         </a:rPr>
                         <a:t>基本信息</a:t>
                       </a:r>
+                      <a:endParaRPr lang="zh-CN" altLang="en-US" sz="1200" b="1" i="0" u="none" strike="noStrike" dirty="0">
+                        <a:solidFill>
+                          <a:srgbClr val="000000"/>
+                        </a:solidFill>
+                        <a:latin typeface="微软雅黑" panose="020B0503020204020204" pitchFamily="34" charset="-122"/>
+                        <a:ea typeface="微软雅黑" panose="020B0503020204020204" pitchFamily="34" charset="-122"/>
+                      </a:endParaRPr>
                     </a:p>
                   </a:txBody>
                   <a:tcPr marL="10079" marR="10079" marT="10080" marB="0" anchor="ctr">
@@ -13745,83 +13701,27 @@
                   </a:tcPr>
                 </a:tc>
                 <a:tc hMerge="1">
-                  <a:txBody>
-                    <a:bodyPr/>
-                    <a:lstStyle/>
-                    <a:p>
-                      <a:endParaRPr lang="zh-CN" altLang="en-US"/>
-                    </a:p>
-                  </a:txBody>
                   <a:tcPr/>
                 </a:tc>
                 <a:tc hMerge="1">
-                  <a:txBody>
-                    <a:bodyPr/>
-                    <a:lstStyle/>
-                    <a:p>
-                      <a:endParaRPr lang="zh-TW" altLang="en-US"/>
-                    </a:p>
-                  </a:txBody>
                   <a:tcPr/>
                 </a:tc>
                 <a:tc hMerge="1">
-                  <a:txBody>
-                    <a:bodyPr/>
-                    <a:lstStyle/>
-                    <a:p>
-                      <a:endParaRPr lang="zh-TW" altLang="en-US"/>
-                    </a:p>
-                  </a:txBody>
                   <a:tcPr/>
                 </a:tc>
                 <a:tc hMerge="1">
-                  <a:txBody>
-                    <a:bodyPr/>
-                    <a:lstStyle/>
-                    <a:p>
-                      <a:endParaRPr lang="zh-CN" altLang="en-US"/>
-                    </a:p>
-                  </a:txBody>
                   <a:tcPr/>
                 </a:tc>
                 <a:tc hMerge="1">
-                  <a:txBody>
-                    <a:bodyPr/>
-                    <a:lstStyle/>
-                    <a:p>
-                      <a:endParaRPr lang="zh-CN" altLang="en-US"/>
-                    </a:p>
-                  </a:txBody>
                   <a:tcPr/>
                 </a:tc>
                 <a:tc hMerge="1">
-                  <a:txBody>
-                    <a:bodyPr/>
-                    <a:lstStyle/>
-                    <a:p>
-                      <a:endParaRPr lang="zh-TW" altLang="en-US"/>
-                    </a:p>
-                  </a:txBody>
                   <a:tcPr/>
                 </a:tc>
                 <a:tc hMerge="1">
-                  <a:txBody>
-                    <a:bodyPr/>
-                    <a:lstStyle/>
-                    <a:p>
-                      <a:endParaRPr lang="zh-CN" altLang="en-US"/>
-                    </a:p>
-                  </a:txBody>
                   <a:tcPr/>
                 </a:tc>
                 <a:tc hMerge="1">
-                  <a:txBody>
-                    <a:bodyPr/>
-                    <a:lstStyle/>
-                    <a:p>
-                      <a:endParaRPr lang="zh-CN" altLang="en-US"/>
-                    </a:p>
-                  </a:txBody>
                   <a:tcPr/>
                 </a:tc>
               </a:tr>
@@ -13837,11 +13737,18 @@
                           <a:solidFill>
                             <a:srgbClr val="000000"/>
                           </a:solidFill>
-                          <a:latin typeface="微软雅黑" pitchFamily="34" charset="-122"/>
-                          <a:ea typeface="微软雅黑" pitchFamily="34" charset="-122"/>
+                          <a:latin typeface="微软雅黑" panose="020B0503020204020204" pitchFamily="34" charset="-122"/>
+                          <a:ea typeface="微软雅黑" panose="020B0503020204020204" pitchFamily="34" charset="-122"/>
                         </a:rPr>
                         <a:t>姓名</a:t>
                       </a:r>
+                      <a:endParaRPr lang="zh-CN" altLang="en-US" sz="1200" b="1" i="0" u="none" strike="noStrike" dirty="0">
+                        <a:solidFill>
+                          <a:srgbClr val="000000"/>
+                        </a:solidFill>
+                        <a:latin typeface="微软雅黑" panose="020B0503020204020204" pitchFamily="34" charset="-122"/>
+                        <a:ea typeface="微软雅黑" panose="020B0503020204020204" pitchFamily="34" charset="-122"/>
+                      </a:endParaRPr>
                     </a:p>
                   </a:txBody>
                   <a:tcPr marL="10079" marR="10079" marT="10080" marB="0" anchor="ctr">
@@ -13894,8 +13801,8 @@
                           <a:solidFill>
                             <a:srgbClr val="000000"/>
                           </a:solidFill>
-                          <a:latin typeface="微软雅黑" pitchFamily="34" charset="-122"/>
-                          <a:ea typeface="微软雅黑" pitchFamily="34" charset="-122"/>
+                          <a:latin typeface="微软雅黑" panose="020B0503020204020204" pitchFamily="34" charset="-122"/>
+                          <a:ea typeface="微软雅黑" panose="020B0503020204020204" pitchFamily="34" charset="-122"/>
                         </a:rPr>
                         <a:t>王磊</a:t>
                       </a:r>
@@ -13904,11 +13811,18 @@
                           <a:solidFill>
                             <a:srgbClr val="000000"/>
                           </a:solidFill>
-                          <a:latin typeface="微软雅黑" pitchFamily="34" charset="-122"/>
-                          <a:ea typeface="微软雅黑" pitchFamily="34" charset="-122"/>
+                          <a:latin typeface="微软雅黑" panose="020B0503020204020204" pitchFamily="34" charset="-122"/>
+                          <a:ea typeface="微软雅黑" panose="020B0503020204020204" pitchFamily="34" charset="-122"/>
                         </a:rPr>
                         <a:t>　</a:t>
                       </a:r>
+                      <a:endParaRPr lang="zh-CN" altLang="en-US" sz="1200" b="0" i="0" u="none" strike="noStrike" dirty="0">
+                        <a:solidFill>
+                          <a:srgbClr val="000000"/>
+                        </a:solidFill>
+                        <a:latin typeface="微软雅黑" panose="020B0503020204020204" pitchFamily="34" charset="-122"/>
+                        <a:ea typeface="微软雅黑" panose="020B0503020204020204" pitchFamily="34" charset="-122"/>
+                      </a:endParaRPr>
                     </a:p>
                   </a:txBody>
                   <a:tcPr marL="10079" marR="10079" marT="10080" marB="0" anchor="ctr">
@@ -13951,23 +13865,9 @@
                   </a:tcPr>
                 </a:tc>
                 <a:tc hMerge="1">
-                  <a:txBody>
-                    <a:bodyPr/>
-                    <a:lstStyle/>
-                    <a:p>
-                      <a:endParaRPr lang="zh-TW" altLang="en-US"/>
-                    </a:p>
-                  </a:txBody>
                   <a:tcPr/>
                 </a:tc>
                 <a:tc hMerge="1">
-                  <a:txBody>
-                    <a:bodyPr/>
-                    <a:lstStyle/>
-                    <a:p>
-                      <a:endParaRPr lang="zh-TW" altLang="en-US"/>
-                    </a:p>
-                  </a:txBody>
                   <a:tcPr/>
                 </a:tc>
                 <a:tc>
@@ -13981,8 +13881,8 @@
                           <a:solidFill>
                             <a:srgbClr val="000000"/>
                           </a:solidFill>
-                          <a:latin typeface="微软雅黑" pitchFamily="34" charset="-122"/>
-                          <a:ea typeface="微软雅黑" pitchFamily="34" charset="-122"/>
+                          <a:latin typeface="微软雅黑" panose="020B0503020204020204" pitchFamily="34" charset="-122"/>
+                          <a:ea typeface="微软雅黑" panose="020B0503020204020204" pitchFamily="34" charset="-122"/>
                         </a:rPr>
                         <a:t>年齡</a:t>
                       </a:r>
@@ -13990,8 +13890,8 @@
                         <a:solidFill>
                           <a:srgbClr val="000000"/>
                         </a:solidFill>
-                        <a:latin typeface="微软雅黑" pitchFamily="34" charset="-122"/>
-                        <a:ea typeface="微软雅黑" pitchFamily="34" charset="-122"/>
+                        <a:latin typeface="微软雅黑" panose="020B0503020204020204" pitchFamily="34" charset="-122"/>
+                        <a:ea typeface="微软雅黑" panose="020B0503020204020204" pitchFamily="34" charset="-122"/>
                       </a:endParaRPr>
                     </a:p>
                   </a:txBody>
@@ -14045,8 +13945,8 @@
                           <a:solidFill>
                             <a:srgbClr val="000000"/>
                           </a:solidFill>
-                          <a:latin typeface="微软雅黑" pitchFamily="34" charset="-122"/>
-                          <a:ea typeface="微软雅黑" pitchFamily="34" charset="-122"/>
+                          <a:latin typeface="微软雅黑" panose="020B0503020204020204" pitchFamily="34" charset="-122"/>
+                          <a:ea typeface="微软雅黑" panose="020B0503020204020204" pitchFamily="34" charset="-122"/>
                         </a:rPr>
                         <a:t>36</a:t>
                       </a:r>
@@ -14054,8 +13954,8 @@
                         <a:solidFill>
                           <a:srgbClr val="000000"/>
                         </a:solidFill>
-                        <a:latin typeface="微软雅黑" pitchFamily="34" charset="-122"/>
-                        <a:ea typeface="微软雅黑" pitchFamily="34" charset="-122"/>
+                        <a:latin typeface="微软雅黑" panose="020B0503020204020204" pitchFamily="34" charset="-122"/>
+                        <a:ea typeface="微软雅黑" panose="020B0503020204020204" pitchFamily="34" charset="-122"/>
                       </a:endParaRPr>
                     </a:p>
                   </a:txBody>
@@ -14099,13 +13999,6 @@
                   </a:tcPr>
                 </a:tc>
                 <a:tc hMerge="1">
-                  <a:txBody>
-                    <a:bodyPr/>
-                    <a:lstStyle/>
-                    <a:p>
-                      <a:endParaRPr lang="zh-TW" altLang="en-US"/>
-                    </a:p>
-                  </a:txBody>
                   <a:tcPr/>
                 </a:tc>
                 <a:tc>
@@ -14127,7 +14020,6 @@
                         <a:buSzTx/>
                         <a:buFontTx/>
                         <a:buNone/>
-                        <a:tabLst/>
                         <a:defRPr/>
                       </a:pPr>
                       <a:r>
@@ -14135,11 +14027,18 @@
                           <a:solidFill>
                             <a:srgbClr val="000000"/>
                           </a:solidFill>
-                          <a:latin typeface="微软雅黑" pitchFamily="34" charset="-122"/>
-                          <a:ea typeface="微软雅黑" pitchFamily="34" charset="-122"/>
+                          <a:latin typeface="微软雅黑" panose="020B0503020204020204" pitchFamily="34" charset="-122"/>
+                          <a:ea typeface="微软雅黑" panose="020B0503020204020204" pitchFamily="34" charset="-122"/>
                         </a:rPr>
                         <a:t>資位</a:t>
                       </a:r>
+                      <a:endParaRPr lang="zh-CN" altLang="en-US" sz="1200" b="1" i="0" u="none" strike="noStrike" dirty="0" smtClean="0">
+                        <a:solidFill>
+                          <a:srgbClr val="000000"/>
+                        </a:solidFill>
+                        <a:latin typeface="微软雅黑" panose="020B0503020204020204" pitchFamily="34" charset="-122"/>
+                        <a:ea typeface="微软雅黑" panose="020B0503020204020204" pitchFamily="34" charset="-122"/>
+                      </a:endParaRPr>
                     </a:p>
                   </a:txBody>
                   <a:tcPr marL="10079" marR="10079" marT="10080" marB="0" anchor="ctr">
@@ -14192,8 +14091,8 @@
                           <a:solidFill>
                             <a:srgbClr val="000000"/>
                           </a:solidFill>
-                          <a:latin typeface="微软雅黑" pitchFamily="34" charset="-122"/>
-                          <a:ea typeface="微软雅黑" pitchFamily="34" charset="-122"/>
+                          <a:latin typeface="微软雅黑" panose="020B0503020204020204" pitchFamily="34" charset="-122"/>
+                          <a:ea typeface="微软雅黑" panose="020B0503020204020204" pitchFamily="34" charset="-122"/>
                         </a:rPr>
                         <a:t>師</a:t>
                       </a:r>
@@ -14202,8 +14101,8 @@
                           <a:solidFill>
                             <a:srgbClr val="000000"/>
                           </a:solidFill>
-                          <a:latin typeface="微软雅黑" pitchFamily="34" charset="-122"/>
-                          <a:ea typeface="微软雅黑" pitchFamily="34" charset="-122"/>
+                          <a:latin typeface="微软雅黑" panose="020B0503020204020204" pitchFamily="34" charset="-122"/>
+                          <a:ea typeface="微软雅黑" panose="020B0503020204020204" pitchFamily="34" charset="-122"/>
                         </a:rPr>
                         <a:t>4</a:t>
                       </a:r>
@@ -14211,8 +14110,8 @@
                         <a:solidFill>
                           <a:srgbClr val="000000"/>
                         </a:solidFill>
-                        <a:latin typeface="微软雅黑" pitchFamily="34" charset="-122"/>
-                        <a:ea typeface="微软雅黑" pitchFamily="34" charset="-122"/>
+                        <a:latin typeface="微软雅黑" panose="020B0503020204020204" pitchFamily="34" charset="-122"/>
+                        <a:ea typeface="微软雅黑" panose="020B0503020204020204" pitchFamily="34" charset="-122"/>
                       </a:endParaRPr>
                     </a:p>
                   </a:txBody>
@@ -14268,8 +14167,8 @@
                           <a:solidFill>
                             <a:srgbClr val="000000"/>
                           </a:solidFill>
-                          <a:latin typeface="微软雅黑" pitchFamily="34" charset="-122"/>
-                          <a:ea typeface="微软雅黑" pitchFamily="34" charset="-122"/>
+                          <a:latin typeface="微软雅黑" panose="020B0503020204020204" pitchFamily="34" charset="-122"/>
+                          <a:ea typeface="微软雅黑" panose="020B0503020204020204" pitchFamily="34" charset="-122"/>
                         </a:rPr>
                         <a:t>學歷</a:t>
                       </a:r>
@@ -14277,8 +14176,8 @@
                         <a:solidFill>
                           <a:srgbClr val="000000"/>
                         </a:solidFill>
-                        <a:latin typeface="微软雅黑" pitchFamily="34" charset="-122"/>
-                        <a:ea typeface="微软雅黑" pitchFamily="34" charset="-122"/>
+                        <a:latin typeface="微软雅黑" panose="020B0503020204020204" pitchFamily="34" charset="-122"/>
+                        <a:ea typeface="微软雅黑" panose="020B0503020204020204" pitchFamily="34" charset="-122"/>
                       </a:endParaRPr>
                     </a:p>
                   </a:txBody>
@@ -14332,8 +14231,8 @@
                           <a:solidFill>
                             <a:srgbClr val="000000"/>
                           </a:solidFill>
-                          <a:latin typeface="微软雅黑" pitchFamily="34" charset="-122"/>
-                          <a:ea typeface="微软雅黑" pitchFamily="34" charset="-122"/>
+                          <a:latin typeface="微软雅黑" panose="020B0503020204020204" pitchFamily="34" charset="-122"/>
+                          <a:ea typeface="微软雅黑" panose="020B0503020204020204" pitchFamily="34" charset="-122"/>
                         </a:rPr>
                         <a:t>本科</a:t>
                       </a:r>
@@ -14341,8 +14240,8 @@
                         <a:solidFill>
                           <a:srgbClr val="000000"/>
                         </a:solidFill>
-                        <a:latin typeface="微软雅黑" pitchFamily="34" charset="-122"/>
-                        <a:ea typeface="微软雅黑" pitchFamily="34" charset="-122"/>
+                        <a:latin typeface="微软雅黑" panose="020B0503020204020204" pitchFamily="34" charset="-122"/>
+                        <a:ea typeface="微软雅黑" panose="020B0503020204020204" pitchFamily="34" charset="-122"/>
                       </a:endParaRPr>
                     </a:p>
                   </a:txBody>
@@ -14386,23 +14285,9 @@
                   </a:tcPr>
                 </a:tc>
                 <a:tc hMerge="1">
-                  <a:txBody>
-                    <a:bodyPr/>
-                    <a:lstStyle/>
-                    <a:p>
-                      <a:endParaRPr lang="zh-TW" altLang="en-US"/>
-                    </a:p>
-                  </a:txBody>
                   <a:tcPr/>
                 </a:tc>
                 <a:tc hMerge="1">
-                  <a:txBody>
-                    <a:bodyPr/>
-                    <a:lstStyle/>
-                    <a:p>
-                      <a:endParaRPr lang="zh-TW" altLang="en-US"/>
-                    </a:p>
-                  </a:txBody>
                   <a:tcPr/>
                 </a:tc>
                 <a:tc>
@@ -14416,8 +14301,8 @@
                           <a:solidFill>
                             <a:srgbClr val="000000"/>
                           </a:solidFill>
-                          <a:latin typeface="微软雅黑" pitchFamily="34" charset="-122"/>
-                          <a:ea typeface="微软雅黑" pitchFamily="34" charset="-122"/>
+                          <a:latin typeface="微软雅黑" panose="020B0503020204020204" pitchFamily="34" charset="-122"/>
+                          <a:ea typeface="微软雅黑" panose="020B0503020204020204" pitchFamily="34" charset="-122"/>
                         </a:rPr>
                         <a:t>畢業學校</a:t>
                       </a:r>
@@ -14425,8 +14310,8 @@
                         <a:solidFill>
                           <a:srgbClr val="000000"/>
                         </a:solidFill>
-                        <a:latin typeface="微软雅黑" pitchFamily="34" charset="-122"/>
-                        <a:ea typeface="微软雅黑" pitchFamily="34" charset="-122"/>
+                        <a:latin typeface="微软雅黑" panose="020B0503020204020204" pitchFamily="34" charset="-122"/>
+                        <a:ea typeface="微软雅黑" panose="020B0503020204020204" pitchFamily="34" charset="-122"/>
                       </a:endParaRPr>
                     </a:p>
                   </a:txBody>
@@ -14480,8 +14365,8 @@
                           <a:solidFill>
                             <a:srgbClr val="000000"/>
                           </a:solidFill>
-                          <a:latin typeface="微软雅黑" pitchFamily="34" charset="-122"/>
-                          <a:ea typeface="微软雅黑" pitchFamily="34" charset="-122"/>
+                          <a:latin typeface="微软雅黑" panose="020B0503020204020204" pitchFamily="34" charset="-122"/>
+                          <a:ea typeface="微软雅黑" panose="020B0503020204020204" pitchFamily="34" charset="-122"/>
                         </a:rPr>
                         <a:t>北京交通大學</a:t>
                       </a:r>
@@ -14489,8 +14374,8 @@
                         <a:solidFill>
                           <a:srgbClr val="000000"/>
                         </a:solidFill>
-                        <a:latin typeface="微软雅黑" pitchFamily="34" charset="-122"/>
-                        <a:ea typeface="微软雅黑" pitchFamily="34" charset="-122"/>
+                        <a:latin typeface="微软雅黑" panose="020B0503020204020204" pitchFamily="34" charset="-122"/>
+                        <a:ea typeface="微软雅黑" panose="020B0503020204020204" pitchFamily="34" charset="-122"/>
                       </a:endParaRPr>
                     </a:p>
                   </a:txBody>
@@ -14534,13 +14419,6 @@
                   </a:tcPr>
                 </a:tc>
                 <a:tc hMerge="1">
-                  <a:txBody>
-                    <a:bodyPr/>
-                    <a:lstStyle/>
-                    <a:p>
-                      <a:endParaRPr lang="zh-TW" altLang="en-US"/>
-                    </a:p>
-                  </a:txBody>
                   <a:tcPr/>
                 </a:tc>
                 <a:tc>
@@ -14554,8 +14432,8 @@
                           <a:solidFill>
                             <a:srgbClr val="000000"/>
                           </a:solidFill>
-                          <a:latin typeface="微软雅黑" pitchFamily="34" charset="-122"/>
-                          <a:ea typeface="微软雅黑" pitchFamily="34" charset="-122"/>
+                          <a:latin typeface="微软雅黑" panose="020B0503020204020204" pitchFamily="34" charset="-122"/>
+                          <a:ea typeface="微软雅黑" panose="020B0503020204020204" pitchFamily="34" charset="-122"/>
                         </a:rPr>
                         <a:t>專業</a:t>
                       </a:r>
@@ -14563,8 +14441,8 @@
                         <a:solidFill>
                           <a:srgbClr val="000000"/>
                         </a:solidFill>
-                        <a:latin typeface="微软雅黑" pitchFamily="34" charset="-122"/>
-                        <a:ea typeface="微软雅黑" pitchFamily="34" charset="-122"/>
+                        <a:latin typeface="微软雅黑" panose="020B0503020204020204" pitchFamily="34" charset="-122"/>
+                        <a:ea typeface="微软雅黑" panose="020B0503020204020204" pitchFamily="34" charset="-122"/>
                       </a:endParaRPr>
                     </a:p>
                   </a:txBody>
@@ -14618,8 +14496,8 @@
                           <a:solidFill>
                             <a:srgbClr val="000000"/>
                           </a:solidFill>
-                          <a:latin typeface="微软雅黑" pitchFamily="34" charset="-122"/>
-                          <a:ea typeface="微软雅黑" pitchFamily="34" charset="-122"/>
+                          <a:latin typeface="微软雅黑" panose="020B0503020204020204" pitchFamily="34" charset="-122"/>
+                          <a:ea typeface="微软雅黑" panose="020B0503020204020204" pitchFamily="34" charset="-122"/>
                         </a:rPr>
                         <a:t>計算機科學與技術</a:t>
                       </a:r>
@@ -14627,8 +14505,8 @@
                         <a:solidFill>
                           <a:srgbClr val="000000"/>
                         </a:solidFill>
-                        <a:latin typeface="微软雅黑" pitchFamily="34" charset="-122"/>
-                        <a:ea typeface="微软雅黑" pitchFamily="34" charset="-122"/>
+                        <a:latin typeface="微软雅黑" panose="020B0503020204020204" pitchFamily="34" charset="-122"/>
+                        <a:ea typeface="微软雅黑" panose="020B0503020204020204" pitchFamily="34" charset="-122"/>
                       </a:endParaRPr>
                     </a:p>
                   </a:txBody>
@@ -14684,8 +14562,8 @@
                           <a:solidFill>
                             <a:srgbClr val="000000"/>
                           </a:solidFill>
-                          <a:latin typeface="微软雅黑" pitchFamily="34" charset="-122"/>
-                          <a:ea typeface="微软雅黑" pitchFamily="34" charset="-122"/>
+                          <a:latin typeface="微软雅黑" panose="020B0503020204020204" pitchFamily="34" charset="-122"/>
+                          <a:ea typeface="微软雅黑" panose="020B0503020204020204" pitchFamily="34" charset="-122"/>
                         </a:rPr>
                         <a:t>現部門</a:t>
                       </a:r>
@@ -14693,8 +14571,8 @@
                         <a:solidFill>
                           <a:srgbClr val="000000"/>
                         </a:solidFill>
-                        <a:latin typeface="微软雅黑" pitchFamily="34" charset="-122"/>
-                        <a:ea typeface="微软雅黑" pitchFamily="34" charset="-122"/>
+                        <a:latin typeface="微软雅黑" panose="020B0503020204020204" pitchFamily="34" charset="-122"/>
+                        <a:ea typeface="微软雅黑" panose="020B0503020204020204" pitchFamily="34" charset="-122"/>
                       </a:endParaRPr>
                     </a:p>
                   </a:txBody>
@@ -14756,7 +14634,6 @@
                         <a:buSzTx/>
                         <a:buFontTx/>
                         <a:buNone/>
-                        <a:tabLst/>
                         <a:defRPr/>
                       </a:pPr>
                       <a:r>
@@ -14764,8 +14641,8 @@
                           <a:solidFill>
                             <a:srgbClr val="000000"/>
                           </a:solidFill>
-                          <a:latin typeface="微软雅黑" pitchFamily="34" charset="-122"/>
-                          <a:ea typeface="微软雅黑" pitchFamily="34" charset="-122"/>
+                          <a:latin typeface="微软雅黑" panose="020B0503020204020204" pitchFamily="34" charset="-122"/>
+                          <a:ea typeface="微软雅黑" panose="020B0503020204020204" pitchFamily="34" charset="-122"/>
                         </a:rPr>
                         <a:t>精益系統管理開發中心</a:t>
                       </a:r>
@@ -14794,11 +14671,18 @@
                           <a:solidFill>
                             <a:srgbClr val="000000"/>
                           </a:solidFill>
-                          <a:latin typeface="微软雅黑" pitchFamily="34" charset="-122"/>
-                          <a:ea typeface="微软雅黑" pitchFamily="34" charset="-122"/>
+                          <a:latin typeface="微软雅黑" panose="020B0503020204020204" pitchFamily="34" charset="-122"/>
+                          <a:ea typeface="微软雅黑" panose="020B0503020204020204" pitchFamily="34" charset="-122"/>
                         </a:rPr>
                         <a:t>　</a:t>
                       </a:r>
+                      <a:endParaRPr lang="zh-CN" altLang="en-US" sz="1200" b="0" i="0" u="none" strike="noStrike" dirty="0">
+                        <a:solidFill>
+                          <a:srgbClr val="000000"/>
+                        </a:solidFill>
+                        <a:latin typeface="微软雅黑" panose="020B0503020204020204" pitchFamily="34" charset="-122"/>
+                        <a:ea typeface="微软雅黑" panose="020B0503020204020204" pitchFamily="34" charset="-122"/>
+                      </a:endParaRPr>
                     </a:p>
                   </a:txBody>
                   <a:tcPr marL="10079" marR="10079" marT="10080" marB="0" anchor="ctr">
@@ -14841,23 +14725,9 @@
                   </a:tcPr>
                 </a:tc>
                 <a:tc hMerge="1">
-                  <a:txBody>
-                    <a:bodyPr/>
-                    <a:lstStyle/>
-                    <a:p>
-                      <a:endParaRPr lang="zh-TW" altLang="en-US"/>
-                    </a:p>
-                  </a:txBody>
                   <a:tcPr/>
                 </a:tc>
                 <a:tc hMerge="1">
-                  <a:txBody>
-                    <a:bodyPr/>
-                    <a:lstStyle/>
-                    <a:p>
-                      <a:endParaRPr lang="zh-TW" altLang="en-US"/>
-                    </a:p>
-                  </a:txBody>
                   <a:tcPr/>
                 </a:tc>
                 <a:tc>
@@ -14871,8 +14741,8 @@
                           <a:solidFill>
                             <a:srgbClr val="000000"/>
                           </a:solidFill>
-                          <a:latin typeface="微软雅黑" pitchFamily="34" charset="-122"/>
-                          <a:ea typeface="微软雅黑" pitchFamily="34" charset="-122"/>
+                          <a:latin typeface="微软雅黑" panose="020B0503020204020204" pitchFamily="34" charset="-122"/>
+                          <a:ea typeface="微软雅黑" panose="020B0503020204020204" pitchFamily="34" charset="-122"/>
                         </a:rPr>
                         <a:t>申報職級</a:t>
                       </a:r>
@@ -14880,8 +14750,8 @@
                         <a:solidFill>
                           <a:srgbClr val="000000"/>
                         </a:solidFill>
-                        <a:latin typeface="微软雅黑" pitchFamily="34" charset="-122"/>
-                        <a:ea typeface="微软雅黑" pitchFamily="34" charset="-122"/>
+                        <a:latin typeface="微软雅黑" panose="020B0503020204020204" pitchFamily="34" charset="-122"/>
+                        <a:ea typeface="微软雅黑" panose="020B0503020204020204" pitchFamily="34" charset="-122"/>
                       </a:endParaRPr>
                     </a:p>
                   </a:txBody>
@@ -14943,7 +14813,6 @@
                         <a:buSzTx/>
                         <a:buFontTx/>
                         <a:buNone/>
-                        <a:tabLst/>
                         <a:defRPr/>
                       </a:pPr>
                       <a:r>
@@ -14966,6 +14835,13 @@
                         </a:rPr>
                         <a:t>研發工程師</a:t>
                       </a:r>
+                      <a:endParaRPr lang="zh-CN" altLang="en-US" sz="1200" b="0" i="0" u="none" strike="noStrike" dirty="0" smtClean="0">
+                        <a:solidFill>
+                          <a:srgbClr val="000000"/>
+                        </a:solidFill>
+                        <a:latin typeface="微软雅黑" panose="020B0503020204020204" pitchFamily="34" charset="-122"/>
+                        <a:ea typeface="微软雅黑" panose="020B0503020204020204" pitchFamily="34" charset="-122"/>
+                      </a:endParaRPr>
                     </a:p>
                   </a:txBody>
                   <a:tcPr marL="10079" marR="10079" marT="10080" marB="0" anchor="ctr">
@@ -15008,13 +14884,6 @@
                   </a:tcPr>
                 </a:tc>
                 <a:tc hMerge="1">
-                  <a:txBody>
-                    <a:bodyPr/>
-                    <a:lstStyle/>
-                    <a:p>
-                      <a:endParaRPr lang="zh-TW" altLang="en-US"/>
-                    </a:p>
-                  </a:txBody>
                   <a:tcPr/>
                 </a:tc>
                 <a:tc>
@@ -15036,7 +14905,6 @@
                         <a:buSzTx/>
                         <a:buFontTx/>
                         <a:buNone/>
-                        <a:tabLst/>
                         <a:defRPr/>
                       </a:pPr>
                       <a:r>
@@ -15044,11 +14912,18 @@
                           <a:solidFill>
                             <a:srgbClr val="000000"/>
                           </a:solidFill>
-                          <a:latin typeface="微软雅黑" pitchFamily="34" charset="-122"/>
-                          <a:ea typeface="微软雅黑" pitchFamily="34" charset="-122"/>
+                          <a:latin typeface="微软雅黑" panose="020B0503020204020204" pitchFamily="34" charset="-122"/>
+                          <a:ea typeface="微软雅黑" panose="020B0503020204020204" pitchFamily="34" charset="-122"/>
                         </a:rPr>
                         <a:t>集團年資</a:t>
                       </a:r>
+                      <a:endParaRPr lang="zh-CN" altLang="en-US" sz="1200" b="1" i="0" u="none" strike="noStrike" dirty="0" smtClean="0">
+                        <a:solidFill>
+                          <a:srgbClr val="000000"/>
+                        </a:solidFill>
+                        <a:latin typeface="微软雅黑" panose="020B0503020204020204" pitchFamily="34" charset="-122"/>
+                        <a:ea typeface="微软雅黑" panose="020B0503020204020204" pitchFamily="34" charset="-122"/>
+                      </a:endParaRPr>
                     </a:p>
                   </a:txBody>
                   <a:tcPr marL="10079" marR="10079" marT="10080" marB="0" anchor="ctr">
@@ -15101,8 +14976,8 @@
                           <a:solidFill>
                             <a:srgbClr val="000000"/>
                           </a:solidFill>
-                          <a:latin typeface="微软雅黑" pitchFamily="34" charset="-122"/>
-                          <a:ea typeface="微软雅黑" pitchFamily="34" charset="-122"/>
+                          <a:latin typeface="微软雅黑" panose="020B0503020204020204" pitchFamily="34" charset="-122"/>
+                          <a:ea typeface="微软雅黑" panose="020B0503020204020204" pitchFamily="34" charset="-122"/>
                         </a:rPr>
                         <a:t>14.4</a:t>
                       </a:r>
@@ -15110,8 +14985,8 @@
                         <a:solidFill>
                           <a:srgbClr val="000000"/>
                         </a:solidFill>
-                        <a:latin typeface="微软雅黑" pitchFamily="34" charset="-122"/>
-                        <a:ea typeface="微软雅黑" pitchFamily="34" charset="-122"/>
+                        <a:latin typeface="微软雅黑" panose="020B0503020204020204" pitchFamily="34" charset="-122"/>
+                        <a:ea typeface="微软雅黑" panose="020B0503020204020204" pitchFamily="34" charset="-122"/>
                       </a:endParaRPr>
                     </a:p>
                   </a:txBody>
@@ -15167,8 +15042,8 @@
                           <a:solidFill>
                             <a:srgbClr val="000000"/>
                           </a:solidFill>
-                          <a:latin typeface="微软雅黑" pitchFamily="34" charset="-122"/>
-                          <a:ea typeface="微软雅黑" pitchFamily="34" charset="-122"/>
+                          <a:latin typeface="微软雅黑" panose="020B0503020204020204" pitchFamily="34" charset="-122"/>
+                          <a:ea typeface="微软雅黑" panose="020B0503020204020204" pitchFamily="34" charset="-122"/>
                         </a:rPr>
                         <a:t>工作履歷（從集團外經歷起，倒序填寫）</a:t>
                       </a:r>
@@ -15176,8 +15051,8 @@
                         <a:solidFill>
                           <a:srgbClr val="000000"/>
                         </a:solidFill>
-                        <a:latin typeface="微软雅黑" pitchFamily="34" charset="-122"/>
-                        <a:ea typeface="微软雅黑" pitchFamily="34" charset="-122"/>
+                        <a:latin typeface="微软雅黑" panose="020B0503020204020204" pitchFamily="34" charset="-122"/>
+                        <a:ea typeface="微软雅黑" panose="020B0503020204020204" pitchFamily="34" charset="-122"/>
                       </a:endParaRPr>
                     </a:p>
                   </a:txBody>
@@ -15227,83 +15102,27 @@
                   </a:tcPr>
                 </a:tc>
                 <a:tc hMerge="1">
-                  <a:txBody>
-                    <a:bodyPr/>
-                    <a:lstStyle/>
-                    <a:p>
-                      <a:endParaRPr lang="zh-CN" altLang="en-US"/>
-                    </a:p>
-                  </a:txBody>
                   <a:tcPr/>
                 </a:tc>
                 <a:tc hMerge="1">
-                  <a:txBody>
-                    <a:bodyPr/>
-                    <a:lstStyle/>
-                    <a:p>
-                      <a:endParaRPr lang="zh-TW" altLang="en-US"/>
-                    </a:p>
-                  </a:txBody>
                   <a:tcPr/>
                 </a:tc>
                 <a:tc hMerge="1">
-                  <a:txBody>
-                    <a:bodyPr/>
-                    <a:lstStyle/>
-                    <a:p>
-                      <a:endParaRPr lang="zh-TW" altLang="en-US"/>
-                    </a:p>
-                  </a:txBody>
                   <a:tcPr/>
                 </a:tc>
                 <a:tc hMerge="1">
-                  <a:txBody>
-                    <a:bodyPr/>
-                    <a:lstStyle/>
-                    <a:p>
-                      <a:endParaRPr lang="zh-CN" altLang="en-US"/>
-                    </a:p>
-                  </a:txBody>
                   <a:tcPr/>
                 </a:tc>
                 <a:tc hMerge="1">
-                  <a:txBody>
-                    <a:bodyPr/>
-                    <a:lstStyle/>
-                    <a:p>
-                      <a:endParaRPr lang="zh-CN" altLang="en-US"/>
-                    </a:p>
-                  </a:txBody>
                   <a:tcPr/>
                 </a:tc>
                 <a:tc hMerge="1">
-                  <a:txBody>
-                    <a:bodyPr/>
-                    <a:lstStyle/>
-                    <a:p>
-                      <a:endParaRPr lang="zh-TW" altLang="en-US"/>
-                    </a:p>
-                  </a:txBody>
                   <a:tcPr/>
                 </a:tc>
                 <a:tc hMerge="1">
-                  <a:txBody>
-                    <a:bodyPr/>
-                    <a:lstStyle/>
-                    <a:p>
-                      <a:endParaRPr lang="zh-CN" altLang="en-US"/>
-                    </a:p>
-                  </a:txBody>
                   <a:tcPr/>
                 </a:tc>
                 <a:tc hMerge="1">
-                  <a:txBody>
-                    <a:bodyPr/>
-                    <a:lstStyle/>
-                    <a:p>
-                      <a:endParaRPr lang="zh-CN" altLang="en-US"/>
-                    </a:p>
-                  </a:txBody>
                   <a:tcPr/>
                 </a:tc>
               </a:tr>
@@ -15319,8 +15138,8 @@
                           <a:solidFill>
                             <a:srgbClr val="000000"/>
                           </a:solidFill>
-                          <a:latin typeface="微软雅黑" pitchFamily="34" charset="-122"/>
-                          <a:ea typeface="微软雅黑" pitchFamily="34" charset="-122"/>
+                          <a:latin typeface="微软雅黑" panose="020B0503020204020204" pitchFamily="34" charset="-122"/>
+                          <a:ea typeface="微软雅黑" panose="020B0503020204020204" pitchFamily="34" charset="-122"/>
                         </a:rPr>
                         <a:t>起止時間</a:t>
                       </a:r>
@@ -15328,8 +15147,8 @@
                         <a:solidFill>
                           <a:srgbClr val="000000"/>
                         </a:solidFill>
-                        <a:latin typeface="微软雅黑" pitchFamily="34" charset="-122"/>
-                        <a:ea typeface="微软雅黑" pitchFamily="34" charset="-122"/>
+                        <a:latin typeface="微软雅黑" panose="020B0503020204020204" pitchFamily="34" charset="-122"/>
+                        <a:ea typeface="微软雅黑" panose="020B0503020204020204" pitchFamily="34" charset="-122"/>
                       </a:endParaRPr>
                     </a:p>
                   </a:txBody>
@@ -15373,13 +15192,6 @@
                   </a:tcPr>
                 </a:tc>
                 <a:tc hMerge="1">
-                  <a:txBody>
-                    <a:bodyPr/>
-                    <a:lstStyle/>
-                    <a:p>
-                      <a:endParaRPr lang="zh-CN" altLang="en-US"/>
-                    </a:p>
-                  </a:txBody>
                   <a:tcPr/>
                 </a:tc>
                 <a:tc>
@@ -15393,8 +15205,8 @@
                           <a:solidFill>
                             <a:srgbClr val="000000"/>
                           </a:solidFill>
-                          <a:latin typeface="微软雅黑" pitchFamily="34" charset="-122"/>
-                          <a:ea typeface="微软雅黑" pitchFamily="34" charset="-122"/>
+                          <a:latin typeface="微软雅黑" panose="020B0503020204020204" pitchFamily="34" charset="-122"/>
+                          <a:ea typeface="微软雅黑" panose="020B0503020204020204" pitchFamily="34" charset="-122"/>
                         </a:rPr>
                         <a:t>任職單位</a:t>
                       </a:r>
@@ -15402,8 +15214,8 @@
                         <a:solidFill>
                           <a:srgbClr val="000000"/>
                         </a:solidFill>
-                        <a:latin typeface="微软雅黑" pitchFamily="34" charset="-122"/>
-                        <a:ea typeface="微软雅黑" pitchFamily="34" charset="-122"/>
+                        <a:latin typeface="微软雅黑" panose="020B0503020204020204" pitchFamily="34" charset="-122"/>
+                        <a:ea typeface="微软雅黑" panose="020B0503020204020204" pitchFamily="34" charset="-122"/>
                       </a:endParaRPr>
                     </a:p>
                   </a:txBody>
@@ -15457,8 +15269,8 @@
                           <a:solidFill>
                             <a:srgbClr val="000000"/>
                           </a:solidFill>
-                          <a:latin typeface="微软雅黑" pitchFamily="34" charset="-122"/>
-                          <a:ea typeface="微软雅黑" pitchFamily="34" charset="-122"/>
+                          <a:latin typeface="微软雅黑" panose="020B0503020204020204" pitchFamily="34" charset="-122"/>
+                          <a:ea typeface="微软雅黑" panose="020B0503020204020204" pitchFamily="34" charset="-122"/>
                         </a:rPr>
                         <a:t>崗位</a:t>
                       </a:r>
@@ -15466,8 +15278,8 @@
                         <a:solidFill>
                           <a:srgbClr val="000000"/>
                         </a:solidFill>
-                        <a:latin typeface="微软雅黑" pitchFamily="34" charset="-122"/>
-                        <a:ea typeface="微软雅黑" pitchFamily="34" charset="-122"/>
+                        <a:latin typeface="微软雅黑" panose="020B0503020204020204" pitchFamily="34" charset="-122"/>
+                        <a:ea typeface="微软雅黑" panose="020B0503020204020204" pitchFamily="34" charset="-122"/>
                       </a:endParaRPr>
                     </a:p>
                   </a:txBody>
@@ -15511,23 +15323,9 @@
                   </a:tcPr>
                 </a:tc>
                 <a:tc hMerge="1">
-                  <a:txBody>
-                    <a:bodyPr/>
-                    <a:lstStyle/>
-                    <a:p>
-                      <a:endParaRPr lang="zh-CN" altLang="en-US"/>
-                    </a:p>
-                  </a:txBody>
                   <a:tcPr/>
                 </a:tc>
                 <a:tc hMerge="1">
-                  <a:txBody>
-                    <a:bodyPr/>
-                    <a:lstStyle/>
-                    <a:p>
-                      <a:endParaRPr lang="zh-CN" altLang="en-US"/>
-                    </a:p>
-                  </a:txBody>
                   <a:tcPr/>
                 </a:tc>
                 <a:tc gridSpan="3">
@@ -15541,8 +15339,8 @@
                           <a:solidFill>
                             <a:srgbClr val="000000"/>
                           </a:solidFill>
-                          <a:latin typeface="微软雅黑" pitchFamily="34" charset="-122"/>
-                          <a:ea typeface="微软雅黑" pitchFamily="34" charset="-122"/>
+                          <a:latin typeface="微软雅黑" panose="020B0503020204020204" pitchFamily="34" charset="-122"/>
+                          <a:ea typeface="微软雅黑" panose="020B0503020204020204" pitchFamily="34" charset="-122"/>
                         </a:rPr>
                         <a:t>工作執掌</a:t>
                       </a:r>
@@ -15550,8 +15348,8 @@
                         <a:solidFill>
                           <a:srgbClr val="000000"/>
                         </a:solidFill>
-                        <a:latin typeface="微软雅黑" pitchFamily="34" charset="-122"/>
-                        <a:ea typeface="微软雅黑" pitchFamily="34" charset="-122"/>
+                        <a:latin typeface="微软雅黑" panose="020B0503020204020204" pitchFamily="34" charset="-122"/>
+                        <a:ea typeface="微软雅黑" panose="020B0503020204020204" pitchFamily="34" charset="-122"/>
                       </a:endParaRPr>
                     </a:p>
                   </a:txBody>
@@ -15595,23 +15393,9 @@
                   </a:tcPr>
                 </a:tc>
                 <a:tc hMerge="1">
-                  <a:txBody>
-                    <a:bodyPr/>
-                    <a:lstStyle/>
-                    <a:p>
-                      <a:endParaRPr lang="zh-CN" altLang="en-US"/>
-                    </a:p>
-                  </a:txBody>
                   <a:tcPr/>
                 </a:tc>
                 <a:tc hMerge="1">
-                  <a:txBody>
-                    <a:bodyPr/>
-                    <a:lstStyle/>
-                    <a:p>
-                      <a:endParaRPr lang="zh-CN" altLang="en-US"/>
-                    </a:p>
-                  </a:txBody>
                   <a:tcPr/>
                 </a:tc>
               </a:tr>
@@ -15642,6 +15426,13 @@
                         </a:rPr>
                         <a:t>至今</a:t>
                       </a:r>
+                      <a:endParaRPr lang="zh-CN" altLang="en-US" sz="1300" b="0" i="0" u="none" strike="noStrike" dirty="0">
+                        <a:solidFill>
+                          <a:srgbClr val="000000"/>
+                        </a:solidFill>
+                        <a:latin typeface="微软雅黑" panose="020B0503020204020204" pitchFamily="34" charset="-122"/>
+                        <a:ea typeface="微软雅黑" panose="020B0503020204020204" pitchFamily="34" charset="-122"/>
+                      </a:endParaRPr>
                     </a:p>
                   </a:txBody>
                   <a:tcPr marL="10079" marR="10079" marT="10080" marB="0" anchor="ctr">
@@ -15684,13 +15475,6 @@
                   </a:tcPr>
                 </a:tc>
                 <a:tc hMerge="1">
-                  <a:txBody>
-                    <a:bodyPr/>
-                    <a:lstStyle/>
-                    <a:p>
-                      <a:endParaRPr lang="zh-TW"/>
-                    </a:p>
-                  </a:txBody>
                   <a:tcPr/>
                 </a:tc>
                 <a:tc>
@@ -15709,6 +15493,13 @@
                         </a:rPr>
                         <a:t>中原資訊總處</a:t>
                       </a:r>
+                      <a:endParaRPr lang="zh-CN" altLang="en-US" sz="1300" b="0" i="0" u="none" strike="noStrike" dirty="0">
+                        <a:solidFill>
+                          <a:srgbClr val="000000"/>
+                        </a:solidFill>
+                        <a:latin typeface="微软雅黑" panose="020B0503020204020204" pitchFamily="34" charset="-122"/>
+                        <a:ea typeface="微软雅黑" panose="020B0503020204020204" pitchFamily="34" charset="-122"/>
+                      </a:endParaRPr>
                     </a:p>
                   </a:txBody>
                   <a:tcPr marL="10079" marR="10079" marT="10080" marB="0" anchor="ctr">
@@ -15776,6 +15567,13 @@
                         </a:rPr>
                         <a:t>開發工程師</a:t>
                       </a:r>
+                      <a:endParaRPr lang="zh-CN" altLang="en-US" sz="1300" b="0" i="0" u="none" strike="noStrike" dirty="0">
+                        <a:solidFill>
+                          <a:srgbClr val="000000"/>
+                        </a:solidFill>
+                        <a:latin typeface="微软雅黑" panose="020B0503020204020204" pitchFamily="34" charset="-122"/>
+                        <a:ea typeface="微软雅黑" panose="020B0503020204020204" pitchFamily="34" charset="-122"/>
+                      </a:endParaRPr>
                     </a:p>
                   </a:txBody>
                   <a:tcPr marL="10079" marR="10079" marT="10080" marB="0" anchor="ctr">
@@ -15818,23 +15616,9 @@
                   </a:tcPr>
                 </a:tc>
                 <a:tc hMerge="1">
-                  <a:txBody>
-                    <a:bodyPr/>
-                    <a:lstStyle/>
-                    <a:p>
-                      <a:endParaRPr lang="zh-TW"/>
-                    </a:p>
-                  </a:txBody>
                   <a:tcPr/>
                 </a:tc>
                 <a:tc hMerge="1">
-                  <a:txBody>
-                    <a:bodyPr/>
-                    <a:lstStyle/>
-                    <a:p>
-                      <a:endParaRPr lang="zh-TW"/>
-                    </a:p>
-                  </a:txBody>
                   <a:tcPr/>
                 </a:tc>
                 <a:tc gridSpan="3">
@@ -15856,7 +15640,6 @@
                         <a:buSzTx/>
                         <a:buFontTx/>
                         <a:buNone/>
-                        <a:tabLst/>
                         <a:defRPr/>
                       </a:pPr>
                       <a:r>
@@ -15954,23 +15737,9 @@
                   </a:tcPr>
                 </a:tc>
                 <a:tc hMerge="1">
-                  <a:txBody>
-                    <a:bodyPr/>
-                    <a:lstStyle/>
-                    <a:p>
-                      <a:endParaRPr lang="zh-TW"/>
-                    </a:p>
-                  </a:txBody>
                   <a:tcPr/>
                 </a:tc>
                 <a:tc hMerge="1">
-                  <a:txBody>
-                    <a:bodyPr/>
-                    <a:lstStyle/>
-                    <a:p>
-                      <a:endParaRPr lang="zh-TW"/>
-                    </a:p>
-                  </a:txBody>
                   <a:tcPr/>
                 </a:tc>
               </a:tr>
@@ -15994,7 +15763,6 @@
                         <a:buSzTx/>
                         <a:buFontTx/>
                         <a:buNone/>
-                        <a:tabLst/>
                         <a:defRPr/>
                       </a:pPr>
                       <a:r>
@@ -16056,13 +15824,6 @@
                   </a:tcPr>
                 </a:tc>
                 <a:tc hMerge="1">
-                  <a:txBody>
-                    <a:bodyPr/>
-                    <a:lstStyle/>
-                    <a:p>
-                      <a:endParaRPr lang="zh-CN" altLang="en-US"/>
-                    </a:p>
-                  </a:txBody>
                   <a:tcPr/>
                 </a:tc>
                 <a:tc>
@@ -16076,8 +15837,8 @@
                           <a:solidFill>
                             <a:srgbClr val="000000"/>
                           </a:solidFill>
-                          <a:latin typeface="微软雅黑" pitchFamily="34" charset="-122"/>
-                          <a:ea typeface="微软雅黑" pitchFamily="34" charset="-122"/>
+                          <a:latin typeface="微软雅黑" panose="020B0503020204020204" pitchFamily="34" charset="-122"/>
+                          <a:ea typeface="微软雅黑" panose="020B0503020204020204" pitchFamily="34" charset="-122"/>
                         </a:rPr>
                         <a:t>太原資訊科技部</a:t>
                       </a:r>
@@ -16085,8 +15846,8 @@
                         <a:solidFill>
                           <a:srgbClr val="000000"/>
                         </a:solidFill>
-                        <a:latin typeface="微软雅黑" pitchFamily="34" charset="-122"/>
-                        <a:ea typeface="微软雅黑" pitchFamily="34" charset="-122"/>
+                        <a:latin typeface="微软雅黑" panose="020B0503020204020204" pitchFamily="34" charset="-122"/>
+                        <a:ea typeface="微软雅黑" panose="020B0503020204020204" pitchFamily="34" charset="-122"/>
                       </a:endParaRPr>
                     </a:p>
                   </a:txBody>
@@ -16148,7 +15909,6 @@
                         <a:buSzTx/>
                         <a:buFontTx/>
                         <a:buNone/>
-                        <a:tabLst/>
                         <a:defRPr/>
                       </a:pPr>
                       <a:r>
@@ -16173,6 +15933,14 @@
                         </a:rPr>
                         <a:t>開發工程師</a:t>
                       </a:r>
+                      <a:endParaRPr lang="zh-CN" altLang="en-US" sz="1300" b="0" i="0" u="none" strike="noStrike" kern="1200" dirty="0" smtClean="0">
+                        <a:solidFill>
+                          <a:srgbClr val="000000"/>
+                        </a:solidFill>
+                        <a:latin typeface="微软雅黑" panose="020B0503020204020204" pitchFamily="34" charset="-122"/>
+                        <a:ea typeface="微软雅黑" panose="020B0503020204020204" pitchFamily="34" charset="-122"/>
+                        <a:cs typeface="+mn-cs"/>
+                      </a:endParaRPr>
                     </a:p>
                   </a:txBody>
                   <a:tcPr marL="10079" marR="10079" marT="10080" marB="0" anchor="ctr">
@@ -16215,23 +15983,9 @@
                   </a:tcPr>
                 </a:tc>
                 <a:tc hMerge="1">
-                  <a:txBody>
-                    <a:bodyPr/>
-                    <a:lstStyle/>
-                    <a:p>
-                      <a:endParaRPr lang="zh-CN" altLang="en-US"/>
-                    </a:p>
-                  </a:txBody>
                   <a:tcPr/>
                 </a:tc>
                 <a:tc hMerge="1">
-                  <a:txBody>
-                    <a:bodyPr/>
-                    <a:lstStyle/>
-                    <a:p>
-                      <a:endParaRPr lang="zh-CN" altLang="en-US"/>
-                    </a:p>
-                  </a:txBody>
                   <a:tcPr/>
                 </a:tc>
                 <a:tc gridSpan="3">
@@ -16253,7 +16007,6 @@
                         <a:buSzTx/>
                         <a:buFontTx/>
                         <a:buNone/>
-                        <a:tabLst/>
                         <a:defRPr/>
                       </a:pPr>
                       <a:r>
@@ -16319,23 +16072,9 @@
                   </a:tcPr>
                 </a:tc>
                 <a:tc hMerge="1">
-                  <a:txBody>
-                    <a:bodyPr/>
-                    <a:lstStyle/>
-                    <a:p>
-                      <a:endParaRPr lang="zh-CN" altLang="en-US"/>
-                    </a:p>
-                  </a:txBody>
                   <a:tcPr/>
                 </a:tc>
                 <a:tc hMerge="1">
-                  <a:txBody>
-                    <a:bodyPr/>
-                    <a:lstStyle/>
-                    <a:p>
-                      <a:endParaRPr lang="zh-CN" altLang="en-US"/>
-                    </a:p>
-                  </a:txBody>
                   <a:tcPr/>
                 </a:tc>
               </a:tr>
@@ -16359,7 +16098,6 @@
                         <a:buSzTx/>
                         <a:buFontTx/>
                         <a:buNone/>
-                        <a:tabLst/>
                         <a:defRPr/>
                       </a:pPr>
                       <a:r>
@@ -16421,13 +16159,6 @@
                   </a:tcPr>
                 </a:tc>
                 <a:tc hMerge="1">
-                  <a:txBody>
-                    <a:bodyPr/>
-                    <a:lstStyle/>
-                    <a:p>
-                      <a:endParaRPr lang="zh-CN" altLang="en-US"/>
-                    </a:p>
-                  </a:txBody>
                   <a:tcPr/>
                 </a:tc>
                 <a:tc>
@@ -16441,8 +16172,8 @@
                           <a:solidFill>
                             <a:srgbClr val="000000"/>
                           </a:solidFill>
-                          <a:latin typeface="微软雅黑" pitchFamily="34" charset="-122"/>
-                          <a:ea typeface="微软雅黑" pitchFamily="34" charset="-122"/>
+                          <a:latin typeface="微软雅黑" panose="020B0503020204020204" pitchFamily="34" charset="-122"/>
+                          <a:ea typeface="微软雅黑" panose="020B0503020204020204" pitchFamily="34" charset="-122"/>
                         </a:rPr>
                         <a:t>太原資訊科技部</a:t>
                       </a:r>
@@ -16450,8 +16181,8 @@
                         <a:solidFill>
                           <a:srgbClr val="000000"/>
                         </a:solidFill>
-                        <a:latin typeface="微软雅黑" pitchFamily="34" charset="-122"/>
-                        <a:ea typeface="微软雅黑" pitchFamily="34" charset="-122"/>
+                        <a:latin typeface="微软雅黑" panose="020B0503020204020204" pitchFamily="34" charset="-122"/>
+                        <a:ea typeface="微软雅黑" panose="020B0503020204020204" pitchFamily="34" charset="-122"/>
                       </a:endParaRPr>
                     </a:p>
                   </a:txBody>
@@ -16505,8 +16236,8 @@
                           <a:solidFill>
                             <a:srgbClr val="000000"/>
                           </a:solidFill>
-                          <a:latin typeface="微软雅黑" pitchFamily="34" charset="-122"/>
-                          <a:ea typeface="微软雅黑" pitchFamily="34" charset="-122"/>
+                          <a:latin typeface="微软雅黑" panose="020B0503020204020204" pitchFamily="34" charset="-122"/>
+                          <a:ea typeface="微软雅黑" panose="020B0503020204020204" pitchFamily="34" charset="-122"/>
                         </a:rPr>
                         <a:t>一卡通工程師</a:t>
                       </a:r>
@@ -16514,8 +16245,8 @@
                         <a:solidFill>
                           <a:srgbClr val="000000"/>
                         </a:solidFill>
-                        <a:latin typeface="微软雅黑" pitchFamily="34" charset="-122"/>
-                        <a:ea typeface="微软雅黑" pitchFamily="34" charset="-122"/>
+                        <a:latin typeface="微软雅黑" panose="020B0503020204020204" pitchFamily="34" charset="-122"/>
+                        <a:ea typeface="微软雅黑" panose="020B0503020204020204" pitchFamily="34" charset="-122"/>
                       </a:endParaRPr>
                     </a:p>
                   </a:txBody>
@@ -16559,23 +16290,9 @@
                   </a:tcPr>
                 </a:tc>
                 <a:tc hMerge="1">
-                  <a:txBody>
-                    <a:bodyPr/>
-                    <a:lstStyle/>
-                    <a:p>
-                      <a:endParaRPr lang="zh-CN" altLang="en-US"/>
-                    </a:p>
-                  </a:txBody>
                   <a:tcPr/>
                 </a:tc>
                 <a:tc hMerge="1">
-                  <a:txBody>
-                    <a:bodyPr/>
-                    <a:lstStyle/>
-                    <a:p>
-                      <a:endParaRPr lang="zh-CN" altLang="en-US"/>
-                    </a:p>
-                  </a:txBody>
                   <a:tcPr/>
                 </a:tc>
                 <a:tc gridSpan="3">
@@ -16597,7 +16314,6 @@
                         <a:buSzTx/>
                         <a:buFontTx/>
                         <a:buNone/>
-                        <a:tabLst/>
                         <a:defRPr/>
                       </a:pPr>
                       <a:r>
@@ -16661,23 +16377,9 @@
                   </a:tcPr>
                 </a:tc>
                 <a:tc hMerge="1">
-                  <a:txBody>
-                    <a:bodyPr/>
-                    <a:lstStyle/>
-                    <a:p>
-                      <a:endParaRPr lang="zh-CN" altLang="en-US"/>
-                    </a:p>
-                  </a:txBody>
                   <a:tcPr/>
                 </a:tc>
                 <a:tc hMerge="1">
-                  <a:txBody>
-                    <a:bodyPr/>
-                    <a:lstStyle/>
-                    <a:p>
-                      <a:endParaRPr lang="zh-CN" altLang="en-US"/>
-                    </a:p>
-                  </a:txBody>
                   <a:tcPr/>
                 </a:tc>
               </a:tr>
@@ -16692,8 +16394,8 @@
                         <a:solidFill>
                           <a:srgbClr val="000000"/>
                         </a:solidFill>
-                        <a:latin typeface="微软雅黑" pitchFamily="34" charset="-122"/>
-                        <a:ea typeface="微软雅黑" pitchFamily="34" charset="-122"/>
+                        <a:latin typeface="微软雅黑" panose="020B0503020204020204" pitchFamily="34" charset="-122"/>
+                        <a:ea typeface="微软雅黑" panose="020B0503020204020204" pitchFamily="34" charset="-122"/>
                       </a:endParaRPr>
                     </a:p>
                   </a:txBody>
@@ -16737,13 +16439,6 @@
                   </a:tcPr>
                 </a:tc>
                 <a:tc hMerge="1">
-                  <a:txBody>
-                    <a:bodyPr/>
-                    <a:lstStyle/>
-                    <a:p>
-                      <a:endParaRPr lang="zh-CN" altLang="en-US"/>
-                    </a:p>
-                  </a:txBody>
                   <a:tcPr/>
                 </a:tc>
                 <a:tc>
@@ -16756,8 +16451,8 @@
                         <a:solidFill>
                           <a:srgbClr val="000000"/>
                         </a:solidFill>
-                        <a:latin typeface="微软雅黑" pitchFamily="34" charset="-122"/>
-                        <a:ea typeface="微软雅黑" pitchFamily="34" charset="-122"/>
+                        <a:latin typeface="微软雅黑" panose="020B0503020204020204" pitchFamily="34" charset="-122"/>
+                        <a:ea typeface="微软雅黑" panose="020B0503020204020204" pitchFamily="34" charset="-122"/>
                       </a:endParaRPr>
                     </a:p>
                   </a:txBody>
@@ -16810,8 +16505,8 @@
                         <a:solidFill>
                           <a:srgbClr val="000000"/>
                         </a:solidFill>
-                        <a:latin typeface="微软雅黑" pitchFamily="34" charset="-122"/>
-                        <a:ea typeface="微软雅黑" pitchFamily="34" charset="-122"/>
+                        <a:latin typeface="微软雅黑" panose="020B0503020204020204" pitchFamily="34" charset="-122"/>
+                        <a:ea typeface="微软雅黑" panose="020B0503020204020204" pitchFamily="34" charset="-122"/>
                       </a:endParaRPr>
                     </a:p>
                   </a:txBody>
@@ -16855,23 +16550,9 @@
                   </a:tcPr>
                 </a:tc>
                 <a:tc hMerge="1">
-                  <a:txBody>
-                    <a:bodyPr/>
-                    <a:lstStyle/>
-                    <a:p>
-                      <a:endParaRPr lang="zh-CN" altLang="en-US"/>
-                    </a:p>
-                  </a:txBody>
                   <a:tcPr/>
                 </a:tc>
                 <a:tc hMerge="1">
-                  <a:txBody>
-                    <a:bodyPr/>
-                    <a:lstStyle/>
-                    <a:p>
-                      <a:endParaRPr lang="zh-CN" altLang="en-US"/>
-                    </a:p>
-                  </a:txBody>
                   <a:tcPr/>
                 </a:tc>
                 <a:tc gridSpan="3">
@@ -16922,23 +16603,9 @@
                   </a:tcPr>
                 </a:tc>
                 <a:tc hMerge="1">
-                  <a:txBody>
-                    <a:bodyPr/>
-                    <a:lstStyle/>
-                    <a:p>
-                      <a:endParaRPr lang="zh-CN" altLang="en-US"/>
-                    </a:p>
-                  </a:txBody>
                   <a:tcPr/>
                 </a:tc>
                 <a:tc hMerge="1">
-                  <a:txBody>
-                    <a:bodyPr/>
-                    <a:lstStyle/>
-                    <a:p>
-                      <a:endParaRPr lang="zh-CN" altLang="en-US"/>
-                    </a:p>
-                  </a:txBody>
                   <a:tcPr/>
                 </a:tc>
               </a:tr>
@@ -16970,14 +16637,14 @@
           <a:p>
             <a:r>
               <a:rPr lang="zh-CN" altLang="en-US" dirty="0" smtClean="0">
-                <a:latin typeface="微软雅黑" pitchFamily="34" charset="-122"/>
-                <a:ea typeface="微软雅黑" pitchFamily="34" charset="-122"/>
+                <a:latin typeface="微软雅黑" panose="020B0503020204020204" pitchFamily="34" charset="-122"/>
+                <a:ea typeface="微软雅黑" panose="020B0503020204020204" pitchFamily="34" charset="-122"/>
               </a:rPr>
               <a:t>基础信息</a:t>
             </a:r>
             <a:endParaRPr lang="zh-CN" altLang="en-US" dirty="0">
-              <a:latin typeface="微软雅黑" pitchFamily="34" charset="-122"/>
-              <a:ea typeface="微软雅黑" pitchFamily="34" charset="-122"/>
+              <a:latin typeface="微软雅黑" panose="020B0503020204020204" pitchFamily="34" charset="-122"/>
+              <a:ea typeface="微软雅黑" panose="020B0503020204020204" pitchFamily="34" charset="-122"/>
             </a:endParaRPr>
           </a:p>
         </p:txBody>
@@ -17055,14 +16722,14 @@
             <a:pPr algn="ctr"/>
             <a:r>
               <a:rPr lang="zh-CN" altLang="en-US" sz="3000" dirty="0" smtClean="0">
-                <a:latin typeface="微软雅黑" pitchFamily="34" charset="-122"/>
-                <a:ea typeface="微软雅黑" pitchFamily="34" charset="-122"/>
+                <a:latin typeface="微软雅黑" panose="020B0503020204020204" pitchFamily="34" charset="-122"/>
+                <a:ea typeface="微软雅黑" panose="020B0503020204020204" pitchFamily="34" charset="-122"/>
               </a:rPr>
               <a:t>技能水平</a:t>
             </a:r>
             <a:endParaRPr lang="zh-CN" altLang="en-US" sz="3000" dirty="0">
-              <a:latin typeface="微软雅黑" pitchFamily="34" charset="-122"/>
-              <a:ea typeface="微软雅黑" pitchFamily="34" charset="-122"/>
+              <a:latin typeface="微软雅黑" panose="020B0503020204020204" pitchFamily="34" charset="-122"/>
+              <a:ea typeface="微软雅黑" panose="020B0503020204020204" pitchFamily="34" charset="-122"/>
             </a:endParaRPr>
           </a:p>
         </p:txBody>
@@ -17621,24 +17288,7 @@
                 <a:ea typeface="微软雅黑" panose="020B0503020204020204" pitchFamily="34" charset="-122"/>
                 <a:sym typeface="+mn-ea"/>
               </a:rPr>
-              <a:t>，掌握信息系統項目開發流程</a:t>
-            </a:r>
-            <a:r>
-              <a:rPr lang="zh-CN" altLang="en-US" sz="2000" dirty="0" smtClean="0">
-                <a:ln>
-                  <a:noFill/>
-                </a:ln>
-                <a:solidFill>
-                  <a:schemeClr val="tx1">
-                    <a:lumMod val="85000"/>
-                    <a:lumOff val="15000"/>
-                  </a:schemeClr>
-                </a:solidFill>
-                <a:latin typeface="微软雅黑" panose="020B0503020204020204" pitchFamily="34" charset="-122"/>
-                <a:ea typeface="微软雅黑" panose="020B0503020204020204" pitchFamily="34" charset="-122"/>
-                <a:sym typeface="+mn-ea"/>
-              </a:rPr>
-              <a:t>。</a:t>
+              <a:t>，掌握信息系統項目開發流程。</a:t>
             </a:r>
             <a:endParaRPr lang="en-US" altLang="zh-CN" sz="2000" dirty="0" smtClean="0">
               <a:ln>
@@ -17739,41 +17389,7 @@
                 <a:ea typeface="微软雅黑" panose="020B0503020204020204" pitchFamily="34" charset="-122"/>
                 <a:sym typeface="+mn-ea"/>
               </a:rPr>
-              <a:t>大</a:t>
-            </a:r>
-            <a:r>
-              <a:rPr lang="zh-CN" altLang="zh-TW" sz="2000" dirty="0" smtClean="0">
-                <a:ln>
-                  <a:noFill/>
-                </a:ln>
-                <a:solidFill>
-                  <a:schemeClr val="tx1">
-                    <a:lumMod val="85000"/>
-                    <a:lumOff val="15000"/>
-                  </a:schemeClr>
-                </a:solidFill>
-                <a:latin typeface="微软雅黑" panose="020B0503020204020204" pitchFamily="34" charset="-122"/>
-                <a:ea typeface="微软雅黑" panose="020B0503020204020204" pitchFamily="34" charset="-122"/>
-                <a:sym typeface="+mn-ea"/>
-              </a:rPr>
-              <a:t>數據相關技</a:t>
-            </a:r>
-            <a:r>
-              <a:rPr lang="zh-CN" altLang="zh-TW" sz="2000" dirty="0" smtClean="0">
-                <a:ln>
-                  <a:noFill/>
-                </a:ln>
-                <a:solidFill>
-                  <a:schemeClr val="tx1">
-                    <a:lumMod val="85000"/>
-                    <a:lumOff val="15000"/>
-                  </a:schemeClr>
-                </a:solidFill>
-                <a:latin typeface="微软雅黑" panose="020B0503020204020204" pitchFamily="34" charset="-122"/>
-                <a:ea typeface="微软雅黑" panose="020B0503020204020204" pitchFamily="34" charset="-122"/>
-                <a:sym typeface="+mn-ea"/>
-              </a:rPr>
-              <a:t>術</a:t>
+              <a:t>大數據相關技術</a:t>
             </a:r>
             <a:r>
               <a:rPr lang="zh-CN" altLang="en-US" sz="2000" dirty="0" smtClean="0">
@@ -18101,6 +17717,17 @@
               </a:rPr>
               <a:t>   </a:t>
             </a:r>
+            <a:endParaRPr lang="en-US" altLang="zh-CN" sz="2000" dirty="0" smtClean="0">
+              <a:solidFill>
+                <a:schemeClr val="tx1">
+                  <a:lumMod val="85000"/>
+                  <a:lumOff val="15000"/>
+                </a:schemeClr>
+              </a:solidFill>
+              <a:latin typeface="微软雅黑" panose="020B0503020204020204" pitchFamily="34" charset="-122"/>
+              <a:ea typeface="微软雅黑" panose="020B0503020204020204" pitchFamily="34" charset="-122"/>
+              <a:sym typeface="+mn-ea"/>
+            </a:endParaRPr>
           </a:p>
           <a:p>
             <a:pPr indent="360680">
@@ -18224,6 +17851,17 @@
               </a:rPr>
               <a:t>１）</a:t>
             </a:r>
+            <a:endParaRPr lang="zh-CN" altLang="en-US" sz="1600" dirty="0" smtClean="0">
+              <a:ln>
+                <a:noFill/>
+              </a:ln>
+              <a:solidFill>
+                <a:schemeClr val="bg1"/>
+              </a:solidFill>
+              <a:latin typeface="微软雅黑" panose="020B0503020204020204" pitchFamily="34" charset="-122"/>
+              <a:ea typeface="微软雅黑" panose="020B0503020204020204" pitchFamily="34" charset="-122"/>
+              <a:sym typeface="+mn-ea"/>
+            </a:endParaRPr>
           </a:p>
         </p:txBody>
       </p:sp>
@@ -18299,6 +17937,17 @@
               </a:rPr>
               <a:t>）</a:t>
             </a:r>
+            <a:endParaRPr lang="zh-CN" altLang="en-US" sz="1600" dirty="0" smtClean="0">
+              <a:ln>
+                <a:noFill/>
+              </a:ln>
+              <a:solidFill>
+                <a:schemeClr val="bg1"/>
+              </a:solidFill>
+              <a:latin typeface="微软雅黑" panose="020B0503020204020204" pitchFamily="34" charset="-122"/>
+              <a:ea typeface="微软雅黑" panose="020B0503020204020204" pitchFamily="34" charset="-122"/>
+              <a:sym typeface="+mn-ea"/>
+            </a:endParaRPr>
           </a:p>
         </p:txBody>
       </p:sp>
@@ -18374,6 +18023,17 @@
               </a:rPr>
               <a:t>）</a:t>
             </a:r>
+            <a:endParaRPr lang="zh-CN" altLang="en-US" sz="1600" dirty="0" smtClean="0">
+              <a:ln>
+                <a:noFill/>
+              </a:ln>
+              <a:solidFill>
+                <a:schemeClr val="bg1"/>
+              </a:solidFill>
+              <a:latin typeface="微软雅黑" panose="020B0503020204020204" pitchFamily="34" charset="-122"/>
+              <a:ea typeface="微软雅黑" panose="020B0503020204020204" pitchFamily="34" charset="-122"/>
+              <a:sym typeface="+mn-ea"/>
+            </a:endParaRPr>
           </a:p>
         </p:txBody>
       </p:sp>
@@ -18449,6 +18109,17 @@
               </a:rPr>
               <a:t>）</a:t>
             </a:r>
+            <a:endParaRPr lang="zh-CN" altLang="en-US" sz="1600" dirty="0" smtClean="0">
+              <a:ln>
+                <a:noFill/>
+              </a:ln>
+              <a:solidFill>
+                <a:schemeClr val="bg1"/>
+              </a:solidFill>
+              <a:latin typeface="微软雅黑" panose="020B0503020204020204" pitchFamily="34" charset="-122"/>
+              <a:ea typeface="微软雅黑" panose="020B0503020204020204" pitchFamily="34" charset="-122"/>
+              <a:sym typeface="+mn-ea"/>
+            </a:endParaRPr>
           </a:p>
         </p:txBody>
       </p:sp>
@@ -18525,14 +18196,14 @@
             <a:pPr algn="ctr"/>
             <a:r>
               <a:rPr lang="zh-CN" altLang="en-US" sz="3000" dirty="0" smtClean="0">
-                <a:latin typeface="微软雅黑" pitchFamily="34" charset="-122"/>
-                <a:ea typeface="微软雅黑" pitchFamily="34" charset="-122"/>
+                <a:latin typeface="微软雅黑" panose="020B0503020204020204" pitchFamily="34" charset="-122"/>
+                <a:ea typeface="微软雅黑" panose="020B0503020204020204" pitchFamily="34" charset="-122"/>
               </a:rPr>
               <a:t>新技術應用</a:t>
             </a:r>
             <a:endParaRPr lang="zh-CN" altLang="en-US" sz="3000" dirty="0">
-              <a:latin typeface="微软雅黑" pitchFamily="34" charset="-122"/>
-              <a:ea typeface="微软雅黑" pitchFamily="34" charset="-122"/>
+              <a:latin typeface="微软雅黑" panose="020B0503020204020204" pitchFamily="34" charset="-122"/>
+              <a:ea typeface="微软雅黑" panose="020B0503020204020204" pitchFamily="34" charset="-122"/>
             </a:endParaRPr>
           </a:p>
         </p:txBody>
@@ -18767,6 +18438,9 @@
               </a:rPr>
               <a:t>微服務平台</a:t>
             </a:r>
+            <a:endParaRPr lang="zh-CN" altLang="en-US" sz="1600">
+              <a:sym typeface="+mn-ea"/>
+            </a:endParaRPr>
           </a:p>
         </p:txBody>
       </p:sp>
@@ -18809,6 +18483,9 @@
               </a:rPr>
               <a:t>本系統功能分模塊化，前後端分離。</a:t>
             </a:r>
+            <a:endParaRPr lang="zh-CN" altLang="en-US" sz="1600" dirty="0">
+              <a:sym typeface="+mn-ea"/>
+            </a:endParaRPr>
           </a:p>
           <a:p>
             <a:pPr>
@@ -18958,13 +18635,7 @@
               <a:rPr lang="zh-CN" altLang="en-US" sz="1600" dirty="0" smtClean="0">
                 <a:sym typeface="+mn-ea"/>
               </a:rPr>
-              <a:t>集群</a:t>
-            </a:r>
-            <a:r>
-              <a:rPr lang="zh-CN" altLang="en-US" sz="1600" dirty="0" smtClean="0">
-                <a:sym typeface="+mn-ea"/>
-              </a:rPr>
-              <a:t>。</a:t>
+              <a:t>集群。</a:t>
             </a:r>
             <a:endParaRPr lang="zh-CN" altLang="en-US" sz="1600" dirty="0"/>
           </a:p>
@@ -19163,6 +18834,10 @@
               </a:rPr>
               <a:t>數據同步工具</a:t>
             </a:r>
+            <a:endParaRPr lang="zh-CN" altLang="en-US" sz="1600" dirty="0">
+              <a:latin typeface="微软雅黑" panose="020B0503020204020204" pitchFamily="34" charset="-122"/>
+              <a:ea typeface="微软雅黑" panose="020B0503020204020204" pitchFamily="34" charset="-122"/>
+            </a:endParaRPr>
           </a:p>
         </p:txBody>
       </p:sp>
@@ -19260,22 +18935,17 @@
         </p:txBody>
       </p:sp>
     </p:spTree>
-    <p:extLst>
-      <p:ext uri="{BB962C8B-B14F-4D97-AF65-F5344CB8AC3E}">
-        <p14:creationId xmlns:p14="http://schemas.microsoft.com/office/powerpoint/2010/main" val="88551077"/>
-      </p:ext>
-    </p:extLst>
   </p:cSld>
   <p:clrMapOvr>
     <a:masterClrMapping/>
   </p:clrMapOvr>
-  <mc:AlternateContent xmlns:mc="http://schemas.openxmlformats.org/markup-compatibility/2006" xmlns:p14="http://schemas.microsoft.com/office/powerpoint/2010/main">
-    <mc:Choice Requires="p14">
+  <mc:AlternateContent xmlns:mc="http://schemas.openxmlformats.org/markup-compatibility/2006">
+    <mc:Choice xmlns:p14="http://schemas.microsoft.com/office/powerpoint/2010/main" Requires="p14">
       <p:transition spd="med" p14:dur="700">
         <p:fade/>
       </p:transition>
     </mc:Choice>
-    <mc:Fallback xmlns="">
+    <mc:Fallback>
       <p:transition spd="med">
         <p:fade/>
       </p:transition>
@@ -19560,7 +19230,7 @@
           <a:bodyPr vert="horz" wrap="square" lIns="91434" tIns="45717" rIns="91434" bIns="45717" numCol="1" rtlCol="0" anchor="t" anchorCtr="0" compatLnSpc="1"/>
           <a:lstStyle/>
           <a:p>
-            <a:pPr defTabSz="914339"/>
+            <a:pPr defTabSz="913765"/>
             <a:endParaRPr lang="zh-CN" altLang="en-US" sz="1700"/>
           </a:p>
         </p:txBody>
@@ -19597,7 +19267,7 @@
           <a:bodyPr vert="horz" wrap="square" lIns="91434" tIns="45717" rIns="91434" bIns="45717" numCol="1" rtlCol="0" anchor="t" anchorCtr="0" compatLnSpc="1"/>
           <a:lstStyle/>
           <a:p>
-            <a:pPr defTabSz="914339"/>
+            <a:pPr defTabSz="913765"/>
             <a:endParaRPr lang="zh-CN" altLang="en-US" sz="1700"/>
           </a:p>
         </p:txBody>
@@ -19645,6 +19315,13 @@
               </a:rPr>
               <a:t>移動報修</a:t>
             </a:r>
+            <a:endParaRPr lang="zh-CN" altLang="en-US" dirty="0" smtClean="0">
+              <a:solidFill>
+                <a:srgbClr val="F8F8F8"/>
+              </a:solidFill>
+              <a:latin typeface="Microsoft YaHei" pitchFamily="34" charset="-122"/>
+              <a:ea typeface="Microsoft YaHei" pitchFamily="34" charset="-122"/>
+            </a:endParaRPr>
           </a:p>
         </p:txBody>
       </p:sp>
@@ -19836,6 +19513,13 @@
               </a:rPr>
               <a:t>滿足多平台嵌入，有效控制專案風險</a:t>
             </a:r>
+            <a:endParaRPr lang="zh-CN" altLang="en-US" dirty="0">
+              <a:solidFill>
+                <a:srgbClr val="F8F8F8"/>
+              </a:solidFill>
+              <a:latin typeface="Microsoft YaHei" pitchFamily="34" charset="-122"/>
+              <a:ea typeface="Microsoft YaHei" pitchFamily="34" charset="-122"/>
+            </a:endParaRPr>
           </a:p>
         </p:txBody>
       </p:sp>
@@ -19899,6 +19583,10 @@
               </a:rPr>
               <a:t>移動報修</a:t>
             </a:r>
+            <a:endParaRPr lang="zh-CN" altLang="en-US" sz="4000" kern="1200" dirty="0" smtClean="0">
+              <a:latin typeface="微软雅黑" panose="020B0503020204020204" pitchFamily="34" charset="-122"/>
+              <a:ea typeface="微软雅黑" panose="020B0503020204020204" pitchFamily="34" charset="-122"/>
+            </a:endParaRPr>
           </a:p>
         </p:txBody>
       </p:sp>
@@ -19940,35 +19628,30 @@
             <a:pPr algn="ctr"/>
             <a:r>
               <a:rPr lang="zh-CN" altLang="en-US" sz="3000" dirty="0" smtClean="0">
-                <a:latin typeface="微软雅黑" pitchFamily="34" charset="-122"/>
-                <a:ea typeface="微软雅黑" pitchFamily="34" charset="-122"/>
+                <a:latin typeface="微软雅黑" panose="020B0503020204020204" pitchFamily="34" charset="-122"/>
+                <a:ea typeface="微软雅黑" panose="020B0503020204020204" pitchFamily="34" charset="-122"/>
               </a:rPr>
               <a:t>專案管理</a:t>
             </a:r>
             <a:endParaRPr lang="zh-CN" altLang="en-US" sz="3000" dirty="0">
-              <a:latin typeface="微软雅黑" pitchFamily="34" charset="-122"/>
-              <a:ea typeface="微软雅黑" pitchFamily="34" charset="-122"/>
+              <a:latin typeface="微软雅黑" panose="020B0503020204020204" pitchFamily="34" charset="-122"/>
+              <a:ea typeface="微软雅黑" panose="020B0503020204020204" pitchFamily="34" charset="-122"/>
             </a:endParaRPr>
           </a:p>
         </p:txBody>
       </p:sp>
     </p:spTree>
-    <p:extLst>
-      <p:ext uri="{BB962C8B-B14F-4D97-AF65-F5344CB8AC3E}">
-        <p14:creationId xmlns:p14="http://schemas.microsoft.com/office/powerpoint/2010/main" val="3143985638"/>
-      </p:ext>
-    </p:extLst>
   </p:cSld>
   <p:clrMapOvr>
     <a:masterClrMapping/>
   </p:clrMapOvr>
-  <mc:AlternateContent xmlns:mc="http://schemas.openxmlformats.org/markup-compatibility/2006" xmlns:p14="http://schemas.microsoft.com/office/powerpoint/2010/main">
-    <mc:Choice Requires="p14">
+  <mc:AlternateContent xmlns:mc="http://schemas.openxmlformats.org/markup-compatibility/2006">
+    <mc:Choice xmlns:p14="http://schemas.microsoft.com/office/powerpoint/2010/main" Requires="p14">
       <p:transition spd="med" p14:dur="700">
         <p:fade/>
       </p:transition>
     </mc:Choice>
-    <mc:Fallback xmlns="">
+    <mc:Fallback>
       <p:transition spd="med">
         <p:fade/>
       </p:transition>
@@ -20663,7 +20346,7 @@
                         <p:par>
                           <p:cTn id="43" fill="hold">
                             <p:stCondLst>
-                              <p:cond delay="2000"/>
+                              <p:cond delay="1500"/>
                             </p:stCondLst>
                             <p:childTnLst>
                               <p:par>
@@ -20906,7 +20589,7 @@
                         <p:par>
                           <p:cTn id="60" fill="hold">
                             <p:stCondLst>
-                              <p:cond delay="3000"/>
+                              <p:cond delay="2500"/>
                             </p:stCondLst>
                             <p:childTnLst>
                               <p:par>
@@ -21099,6 +20782,686 @@
       </p:grpSpPr>
       <p:sp>
         <p:nvSpPr>
+          <p:cNvPr id="9" name="TextBox 7"/>
+          <p:cNvSpPr txBox="1"/>
+          <p:nvPr/>
+        </p:nvSpPr>
+        <p:spPr>
+          <a:xfrm>
+            <a:off x="4583031" y="1742141"/>
+            <a:ext cx="935285" cy="643890"/>
+          </a:xfrm>
+          <a:prstGeom prst="rect">
+            <a:avLst/>
+          </a:prstGeom>
+          <a:noFill/>
+        </p:spPr>
+        <p:txBody>
+          <a:bodyPr wrap="square" lIns="91434" tIns="45717" rIns="91434" bIns="45717" rtlCol="0">
+            <a:spAutoFit/>
+          </a:bodyPr>
+          <a:lstStyle/>
+          <a:p>
+            <a:pPr algn="ctr"/>
+            <a:r>
+              <a:rPr lang="en-US" altLang="zh-CN" dirty="0" smtClean="0">
+                <a:solidFill>
+                  <a:srgbClr val="F8F8F8"/>
+                </a:solidFill>
+                <a:latin typeface="Microsoft YaHei" pitchFamily="34" charset="-122"/>
+                <a:ea typeface="Microsoft YaHei" pitchFamily="34" charset="-122"/>
+              </a:rPr>
+              <a:t>CAA</a:t>
+            </a:r>
+            <a:r>
+              <a:rPr lang="zh-CN" altLang="en-US" dirty="0" smtClean="0">
+                <a:solidFill>
+                  <a:srgbClr val="F8F8F8"/>
+                </a:solidFill>
+                <a:latin typeface="Microsoft YaHei" pitchFamily="34" charset="-122"/>
+                <a:ea typeface="Microsoft YaHei" pitchFamily="34" charset="-122"/>
+              </a:rPr>
+              <a:t>移動報</a:t>
+            </a:r>
+            <a:endParaRPr lang="zh-CN" altLang="en-US" dirty="0" smtClean="0">
+              <a:solidFill>
+                <a:srgbClr val="F8F8F8"/>
+              </a:solidFill>
+              <a:latin typeface="Microsoft YaHei" pitchFamily="34" charset="-122"/>
+              <a:ea typeface="Microsoft YaHei" pitchFamily="34" charset="-122"/>
+            </a:endParaRPr>
+          </a:p>
+        </p:txBody>
+      </p:sp>
+      <p:sp>
+        <p:nvSpPr>
+          <p:cNvPr id="10" name="TextBox 8"/>
+          <p:cNvSpPr txBox="1"/>
+          <p:nvPr/>
+        </p:nvSpPr>
+        <p:spPr>
+          <a:xfrm>
+            <a:off x="7823809" y="2993728"/>
+            <a:ext cx="921062" cy="646325"/>
+          </a:xfrm>
+          <a:prstGeom prst="rect">
+            <a:avLst/>
+          </a:prstGeom>
+          <a:noFill/>
+        </p:spPr>
+        <p:txBody>
+          <a:bodyPr wrap="square" lIns="91434" tIns="45717" rIns="91434" bIns="45717" rtlCol="0">
+            <a:spAutoFit/>
+          </a:bodyPr>
+          <a:lstStyle/>
+          <a:p>
+            <a:pPr algn="ctr"/>
+            <a:r>
+              <a:rPr lang="en-US" altLang="zh-CN" dirty="0" smtClean="0">
+                <a:solidFill>
+                  <a:srgbClr val="F8F8F8"/>
+                </a:solidFill>
+                <a:latin typeface="Microsoft YaHei" pitchFamily="34" charset="-122"/>
+                <a:ea typeface="Microsoft YaHei" pitchFamily="34" charset="-122"/>
+              </a:rPr>
+              <a:t>CAA</a:t>
+            </a:r>
+            <a:r>
+              <a:rPr lang="zh-CN" altLang="en-US" dirty="0" smtClean="0">
+                <a:solidFill>
+                  <a:srgbClr val="F8F8F8"/>
+                </a:solidFill>
+                <a:latin typeface="Microsoft YaHei" pitchFamily="34" charset="-122"/>
+                <a:ea typeface="Microsoft YaHei" pitchFamily="34" charset="-122"/>
+              </a:rPr>
+              <a:t>移動報修</a:t>
+            </a:r>
+            <a:endParaRPr lang="zh-CN" altLang="en-US" dirty="0">
+              <a:solidFill>
+                <a:srgbClr val="F8F8F8"/>
+              </a:solidFill>
+              <a:latin typeface="Microsoft YaHei" pitchFamily="34" charset="-122"/>
+              <a:ea typeface="Microsoft YaHei" pitchFamily="34" charset="-122"/>
+            </a:endParaRPr>
+          </a:p>
+        </p:txBody>
+      </p:sp>
+      <p:sp>
+        <p:nvSpPr>
+          <p:cNvPr id="14" name="TextBox 12"/>
+          <p:cNvSpPr txBox="1"/>
+          <p:nvPr/>
+        </p:nvSpPr>
+        <p:spPr>
+          <a:xfrm>
+            <a:off x="6319982" y="3659660"/>
+            <a:ext cx="1982582" cy="1200323"/>
+          </a:xfrm>
+          <a:prstGeom prst="rect">
+            <a:avLst/>
+          </a:prstGeom>
+          <a:noFill/>
+        </p:spPr>
+        <p:txBody>
+          <a:bodyPr wrap="square" lIns="91434" tIns="45717" rIns="91434" bIns="45717" rtlCol="0">
+            <a:spAutoFit/>
+          </a:bodyPr>
+          <a:lstStyle/>
+          <a:p>
+            <a:pPr algn="ctr"/>
+            <a:r>
+              <a:rPr lang="zh-CN" altLang="en-US" dirty="0">
+                <a:solidFill>
+                  <a:srgbClr val="F8F8F8"/>
+                </a:solidFill>
+                <a:latin typeface="Microsoft YaHei" pitchFamily="34" charset="-122"/>
+                <a:ea typeface="Microsoft YaHei" pitchFamily="34" charset="-122"/>
+              </a:rPr>
+              <a:t>移動端使用</a:t>
+            </a:r>
+            <a:r>
+              <a:rPr lang="en-US" altLang="zh-CN" dirty="0" err="1">
+                <a:solidFill>
+                  <a:srgbClr val="F8F8F8"/>
+                </a:solidFill>
+                <a:latin typeface="Microsoft YaHei" pitchFamily="34" charset="-122"/>
+                <a:ea typeface="Microsoft YaHei" pitchFamily="34" charset="-122"/>
+              </a:rPr>
+              <a:t>Vue</a:t>
+            </a:r>
+            <a:r>
+              <a:rPr lang="zh-CN" altLang="en-US" dirty="0">
+                <a:solidFill>
+                  <a:srgbClr val="F8F8F8"/>
+                </a:solidFill>
+                <a:latin typeface="Microsoft YaHei" pitchFamily="34" charset="-122"/>
+                <a:ea typeface="Microsoft YaHei" pitchFamily="34" charset="-122"/>
+              </a:rPr>
+              <a:t>開發</a:t>
+            </a:r>
+            <a:r>
+              <a:rPr lang="en-US" altLang="zh-CN" dirty="0">
+                <a:solidFill>
+                  <a:srgbClr val="F8F8F8"/>
+                </a:solidFill>
+                <a:latin typeface="Microsoft YaHei" pitchFamily="34" charset="-122"/>
+                <a:ea typeface="Microsoft YaHei" pitchFamily="34" charset="-122"/>
+              </a:rPr>
+              <a:t>,</a:t>
+            </a:r>
+            <a:r>
+              <a:rPr lang="zh-CN" altLang="en-US" dirty="0">
+                <a:solidFill>
+                  <a:srgbClr val="F8F8F8"/>
+                </a:solidFill>
+                <a:latin typeface="Microsoft YaHei" pitchFamily="34" charset="-122"/>
+                <a:ea typeface="Microsoft YaHei" pitchFamily="34" charset="-122"/>
+              </a:rPr>
+              <a:t>滿足多平台嵌入，有效控制專案風險</a:t>
+            </a:r>
+            <a:endParaRPr lang="zh-CN" altLang="en-US" dirty="0">
+              <a:solidFill>
+                <a:srgbClr val="F8F8F8"/>
+              </a:solidFill>
+              <a:latin typeface="Microsoft YaHei" pitchFamily="34" charset="-122"/>
+              <a:ea typeface="Microsoft YaHei" pitchFamily="34" charset="-122"/>
+            </a:endParaRPr>
+          </a:p>
+        </p:txBody>
+      </p:sp>
+      <p:sp>
+        <p:nvSpPr>
+          <p:cNvPr id="19" name="矩形 18"/>
+          <p:cNvSpPr/>
+          <p:nvPr/>
+        </p:nvSpPr>
+        <p:spPr>
+          <a:xfrm>
+            <a:off x="877482" y="565489"/>
+            <a:ext cx="9772015" cy="930802"/>
+          </a:xfrm>
+          <a:prstGeom prst="rect">
+            <a:avLst/>
+          </a:prstGeom>
+        </p:spPr>
+        <p:style>
+          <a:lnRef idx="0">
+            <a:scrgbClr r="0" g="0" b="0"/>
+          </a:lnRef>
+          <a:fillRef idx="0">
+            <a:scrgbClr r="0" g="0" b="0"/>
+          </a:fillRef>
+          <a:effectRef idx="0">
+            <a:scrgbClr r="0" g="0" b="0"/>
+          </a:effectRef>
+          <a:fontRef idx="minor">
+            <a:schemeClr val="lt1"/>
+          </a:fontRef>
+        </p:style>
+        <p:txBody>
+          <a:bodyPr spcFirstLastPara="0" vert="horz" wrap="square" lIns="284480" tIns="162560" rIns="284480" bIns="162560" numCol="1" spcCol="1270" anchor="ctr" anchorCtr="0">
+            <a:noAutofit/>
+          </a:bodyPr>
+          <a:lstStyle/>
+          <a:p>
+            <a:pPr lvl="0" algn="ctr" defTabSz="1778000">
+              <a:lnSpc>
+                <a:spcPct val="100000"/>
+              </a:lnSpc>
+              <a:spcBef>
+                <a:spcPct val="0"/>
+              </a:spcBef>
+              <a:spcAft>
+                <a:spcPct val="35000"/>
+              </a:spcAft>
+            </a:pPr>
+            <a:r>
+              <a:rPr lang="en-US" altLang="zh-CN" sz="4000" kern="1200" dirty="0" smtClean="0">
+                <a:latin typeface="微软雅黑" panose="020B0503020204020204" pitchFamily="34" charset="-122"/>
+                <a:ea typeface="微软雅黑" panose="020B0503020204020204" pitchFamily="34" charset="-122"/>
+              </a:rPr>
+              <a:t>CAA</a:t>
+            </a:r>
+            <a:r>
+              <a:rPr lang="zh-CN" altLang="en-US" sz="4000" kern="1200" dirty="0" smtClean="0">
+                <a:latin typeface="微软雅黑" panose="020B0503020204020204" pitchFamily="34" charset="-122"/>
+                <a:ea typeface="微软雅黑" panose="020B0503020204020204" pitchFamily="34" charset="-122"/>
+              </a:rPr>
+              <a:t>移動報修</a:t>
+            </a:r>
+            <a:endParaRPr lang="zh-CN" altLang="en-US" sz="4000" kern="1200" dirty="0" smtClean="0">
+              <a:latin typeface="微软雅黑" panose="020B0503020204020204" pitchFamily="34" charset="-122"/>
+              <a:ea typeface="微软雅黑" panose="020B0503020204020204" pitchFamily="34" charset="-122"/>
+            </a:endParaRPr>
+          </a:p>
+        </p:txBody>
+      </p:sp>
+      <p:sp>
+        <p:nvSpPr>
+          <p:cNvPr id="13" name="TextBox 3"/>
+          <p:cNvSpPr txBox="1"/>
+          <p:nvPr/>
+        </p:nvSpPr>
+        <p:spPr>
+          <a:xfrm>
+            <a:off x="628509" y="733384"/>
+            <a:ext cx="2590621" cy="559372"/>
+          </a:xfrm>
+          <a:prstGeom prst="rect">
+            <a:avLst/>
+          </a:prstGeom>
+        </p:spPr>
+        <p:style>
+          <a:lnRef idx="1">
+            <a:schemeClr val="accent3"/>
+          </a:lnRef>
+          <a:fillRef idx="3">
+            <a:schemeClr val="accent3"/>
+          </a:fillRef>
+          <a:effectRef idx="2">
+            <a:schemeClr val="accent3"/>
+          </a:effectRef>
+          <a:fontRef idx="minor">
+            <a:schemeClr val="lt1"/>
+          </a:fontRef>
+        </p:style>
+        <p:txBody>
+          <a:bodyPr wrap="square" lIns="96762" tIns="48381" rIns="96762" bIns="48381" rtlCol="0">
+            <a:spAutoFit/>
+          </a:bodyPr>
+          <a:lstStyle/>
+          <a:p>
+            <a:pPr algn="ctr"/>
+            <a:r>
+              <a:rPr lang="zh-CN" altLang="en-US" sz="3000" dirty="0" smtClean="0">
+                <a:latin typeface="微软雅黑" panose="020B0503020204020204" pitchFamily="34" charset="-122"/>
+                <a:ea typeface="微软雅黑" panose="020B0503020204020204" pitchFamily="34" charset="-122"/>
+              </a:rPr>
+              <a:t>專案管理</a:t>
+            </a:r>
+            <a:endParaRPr lang="zh-CN" altLang="en-US" sz="3000" dirty="0">
+              <a:latin typeface="微软雅黑" panose="020B0503020204020204" pitchFamily="34" charset="-122"/>
+              <a:ea typeface="微软雅黑" panose="020B0503020204020204" pitchFamily="34" charset="-122"/>
+            </a:endParaRPr>
+          </a:p>
+        </p:txBody>
+      </p:sp>
+      <p:sp>
+        <p:nvSpPr>
+          <p:cNvPr id="2" name="文本框 1"/>
+          <p:cNvSpPr txBox="1"/>
+          <p:nvPr/>
+        </p:nvSpPr>
+        <p:spPr>
+          <a:xfrm>
+            <a:off x="1079500" y="1988185"/>
+            <a:ext cx="7523480" cy="922020"/>
+          </a:xfrm>
+          <a:prstGeom prst="rect">
+            <a:avLst/>
+          </a:prstGeom>
+          <a:noFill/>
+        </p:spPr>
+        <p:txBody>
+          <a:bodyPr wrap="none" rtlCol="0">
+            <a:spAutoFit/>
+          </a:bodyPr>
+          <a:p>
+            <a:r>
+              <a:rPr lang="en-US" altLang="zh-CN"/>
+              <a:t>1. </a:t>
+            </a:r>
+            <a:r>
+              <a:rPr lang="zh-TW" altLang="en-US"/>
+              <a:t>盡可能全面地提前預估專案推行過程中的技術難點及可能出現的問題。</a:t>
+            </a:r>
+            <a:endParaRPr lang="zh-TW" altLang="en-US"/>
+          </a:p>
+          <a:p>
+            <a:endParaRPr lang="en-US" altLang="zh-TW"/>
+          </a:p>
+          <a:p>
+            <a:r>
+              <a:rPr lang="en-US" altLang="zh-TW"/>
+              <a:t>2. </a:t>
+            </a:r>
+            <a:r>
+              <a:rPr lang="zh-TW" altLang="en-US"/>
+              <a:t>關注專案進行中關鍵節點的進度，保證關鍵節點的按時完成。</a:t>
+            </a:r>
+            <a:endParaRPr lang="zh-TW" altLang="en-US"/>
+          </a:p>
+        </p:txBody>
+      </p:sp>
+    </p:spTree>
+  </p:cSld>
+  <p:clrMapOvr>
+    <a:masterClrMapping/>
+  </p:clrMapOvr>
+  <mc:AlternateContent xmlns:mc="http://schemas.openxmlformats.org/markup-compatibility/2006">
+    <mc:Choice xmlns:p14="http://schemas.microsoft.com/office/powerpoint/2010/main" Requires="p14">
+      <p:transition spd="med" p14:dur="700">
+        <p:fade/>
+      </p:transition>
+    </mc:Choice>
+    <mc:Fallback>
+      <p:transition spd="med">
+        <p:fade/>
+      </p:transition>
+    </mc:Fallback>
+  </mc:AlternateContent>
+  <p:timing>
+    <p:tnLst>
+      <p:par>
+        <p:cTn id="1" dur="indefinite" restart="never" nodeType="tmRoot">
+          <p:childTnLst>
+            <p:seq concurrent="1" nextAc="seek">
+              <p:cTn id="2" dur="indefinite" nodeType="mainSeq">
+                <p:childTnLst>
+                  <p:par>
+                    <p:cTn id="3" fill="hold">
+                      <p:stCondLst>
+                        <p:cond delay="indefinite"/>
+                        <p:cond evt="onBegin" delay="0">
+                          <p:tn val="2"/>
+                        </p:cond>
+                      </p:stCondLst>
+                      <p:childTnLst>
+                        <p:par>
+                          <p:cTn id="4" fill="hold">
+                            <p:stCondLst>
+                              <p:cond delay="0"/>
+                            </p:stCondLst>
+                            <p:childTnLst>
+                              <p:par>
+                                <p:cTn id="5" presetID="52" presetClass="entr" presetSubtype="0" fill="hold" grpId="0" nodeType="withEffect">
+                                  <p:stCondLst>
+                                    <p:cond delay="0"/>
+                                  </p:stCondLst>
+                                  <p:childTnLst>
+                                    <p:set>
+                                      <p:cBhvr>
+                                        <p:cTn id="6" dur="1" fill="hold">
+                                          <p:stCondLst>
+                                            <p:cond delay="0"/>
+                                          </p:stCondLst>
+                                        </p:cTn>
+                                        <p:tgtEl>
+                                          <p:spTgt spid="9"/>
+                                        </p:tgtEl>
+                                        <p:attrNameLst>
+                                          <p:attrName>style.visibility</p:attrName>
+                                        </p:attrNameLst>
+                                      </p:cBhvr>
+                                      <p:to>
+                                        <p:strVal val="visible"/>
+                                      </p:to>
+                                    </p:set>
+                                    <p:animScale>
+                                      <p:cBhvr>
+                                        <p:cTn id="7" dur="1000" decel="50000" fill="hold">
+                                          <p:stCondLst>
+                                            <p:cond delay="0"/>
+                                          </p:stCondLst>
+                                        </p:cTn>
+                                        <p:tgtEl>
+                                          <p:spTgt spid="9"/>
+                                        </p:tgtEl>
+                                      </p:cBhvr>
+                                      <p:from x="250000" y="250000"/>
+                                      <p:to x="100000" y="100000"/>
+                                    </p:animScale>
+                                    <p:animMotion origin="layout" path="M -0.46736 0.92887  C -0.37517 0.88508  -0.02552 0.75279  0.0908 0.66613  C  0.20747 0.57948  0.21649 0.50394  0.23177 0.40825  C 0.24705 0.31256  0.22118 0.15964   0.18264 0.09152  C 0.1441 0.02341  0.03802 0.0  0.0 0.0  " pathEditMode="relative" ptsTypes="">
+                                      <p:cBhvr>
+                                        <p:cTn id="8" dur="1000" decel="50000" fill="hold">
+                                          <p:stCondLst>
+                                            <p:cond delay="0"/>
+                                          </p:stCondLst>
+                                        </p:cTn>
+                                        <p:tgtEl>
+                                          <p:spTgt spid="9"/>
+                                        </p:tgtEl>
+                                        <p:attrNameLst>
+                                          <p:attrName>ppt_x</p:attrName>
+                                          <p:attrName>ppt_y</p:attrName>
+                                        </p:attrNameLst>
+                                      </p:cBhvr>
+                                    </p:animMotion>
+                                    <p:animEffect transition="in" filter="fade">
+                                      <p:cBhvr>
+                                        <p:cTn id="9" dur="1000"/>
+                                        <p:tgtEl>
+                                          <p:spTgt spid="9"/>
+                                        </p:tgtEl>
+                                      </p:cBhvr>
+                                    </p:animEffect>
+                                  </p:childTnLst>
+                                </p:cTn>
+                              </p:par>
+                              <p:par>
+                                <p:cTn id="10" presetID="31" presetClass="entr" presetSubtype="0" fill="hold" grpId="0" nodeType="withEffect">
+                                  <p:stCondLst>
+                                    <p:cond delay="0"/>
+                                  </p:stCondLst>
+                                  <p:childTnLst>
+                                    <p:set>
+                                      <p:cBhvr>
+                                        <p:cTn id="11" dur="1" fill="hold">
+                                          <p:stCondLst>
+                                            <p:cond delay="0"/>
+                                          </p:stCondLst>
+                                        </p:cTn>
+                                        <p:tgtEl>
+                                          <p:spTgt spid="14"/>
+                                        </p:tgtEl>
+                                        <p:attrNameLst>
+                                          <p:attrName>style.visibility</p:attrName>
+                                        </p:attrNameLst>
+                                      </p:cBhvr>
+                                      <p:to>
+                                        <p:strVal val="visible"/>
+                                      </p:to>
+                                    </p:set>
+                                    <p:anim calcmode="lin" valueType="num">
+                                      <p:cBhvr>
+                                        <p:cTn id="12" dur="500" fill="hold"/>
+                                        <p:tgtEl>
+                                          <p:spTgt spid="14"/>
+                                        </p:tgtEl>
+                                        <p:attrNameLst>
+                                          <p:attrName>ppt_w</p:attrName>
+                                        </p:attrNameLst>
+                                      </p:cBhvr>
+                                      <p:tavLst>
+                                        <p:tav tm="0">
+                                          <p:val>
+                                            <p:fltVal val="0"/>
+                                          </p:val>
+                                        </p:tav>
+                                        <p:tav tm="100000">
+                                          <p:val>
+                                            <p:strVal val="#ppt_w"/>
+                                          </p:val>
+                                        </p:tav>
+                                      </p:tavLst>
+                                    </p:anim>
+                                    <p:anim calcmode="lin" valueType="num">
+                                      <p:cBhvr>
+                                        <p:cTn id="13" dur="500" fill="hold"/>
+                                        <p:tgtEl>
+                                          <p:spTgt spid="14"/>
+                                        </p:tgtEl>
+                                        <p:attrNameLst>
+                                          <p:attrName>ppt_h</p:attrName>
+                                        </p:attrNameLst>
+                                      </p:cBhvr>
+                                      <p:tavLst>
+                                        <p:tav tm="0">
+                                          <p:val>
+                                            <p:fltVal val="0"/>
+                                          </p:val>
+                                        </p:tav>
+                                        <p:tav tm="100000">
+                                          <p:val>
+                                            <p:strVal val="#ppt_h"/>
+                                          </p:val>
+                                        </p:tav>
+                                      </p:tavLst>
+                                    </p:anim>
+                                    <p:anim calcmode="lin" valueType="num">
+                                      <p:cBhvr>
+                                        <p:cTn id="14" dur="500" fill="hold"/>
+                                        <p:tgtEl>
+                                          <p:spTgt spid="14"/>
+                                        </p:tgtEl>
+                                        <p:attrNameLst>
+                                          <p:attrName>style.rotation</p:attrName>
+                                        </p:attrNameLst>
+                                      </p:cBhvr>
+                                      <p:tavLst>
+                                        <p:tav tm="0">
+                                          <p:val>
+                                            <p:fltVal val="90"/>
+                                          </p:val>
+                                        </p:tav>
+                                        <p:tav tm="100000">
+                                          <p:val>
+                                            <p:fltVal val="0"/>
+                                          </p:val>
+                                        </p:tav>
+                                      </p:tavLst>
+                                    </p:anim>
+                                    <p:animEffect transition="in" filter="fade">
+                                      <p:cBhvr>
+                                        <p:cTn id="15" dur="500"/>
+                                        <p:tgtEl>
+                                          <p:spTgt spid="14"/>
+                                        </p:tgtEl>
+                                      </p:cBhvr>
+                                    </p:animEffect>
+                                  </p:childTnLst>
+                                </p:cTn>
+                              </p:par>
+                              <p:par>
+                                <p:cTn id="16" presetID="52" presetClass="entr" presetSubtype="0" fill="hold" grpId="0" nodeType="withEffect">
+                                  <p:stCondLst>
+                                    <p:cond delay="0"/>
+                                  </p:stCondLst>
+                                  <p:childTnLst>
+                                    <p:set>
+                                      <p:cBhvr>
+                                        <p:cTn id="17" dur="1" fill="hold">
+                                          <p:stCondLst>
+                                            <p:cond delay="0"/>
+                                          </p:stCondLst>
+                                        </p:cTn>
+                                        <p:tgtEl>
+                                          <p:spTgt spid="10"/>
+                                        </p:tgtEl>
+                                        <p:attrNameLst>
+                                          <p:attrName>style.visibility</p:attrName>
+                                        </p:attrNameLst>
+                                      </p:cBhvr>
+                                      <p:to>
+                                        <p:strVal val="visible"/>
+                                      </p:to>
+                                    </p:set>
+                                    <p:animScale>
+                                      <p:cBhvr>
+                                        <p:cTn id="18" dur="1000" decel="50000" fill="hold">
+                                          <p:stCondLst>
+                                            <p:cond delay="0"/>
+                                          </p:stCondLst>
+                                        </p:cTn>
+                                        <p:tgtEl>
+                                          <p:spTgt spid="10"/>
+                                        </p:tgtEl>
+                                      </p:cBhvr>
+                                      <p:from x="250000" y="250000"/>
+                                      <p:to x="100000" y="100000"/>
+                                    </p:animScale>
+                                    <p:animMotion origin="layout" path="M -0.46736 0.92887  C -0.37517 0.88508  -0.02552 0.75279  0.0908 0.66613  C  0.20747 0.57948  0.21649 0.50394  0.23177 0.40825  C 0.24705 0.31256  0.22118 0.15964   0.18264 0.09152  C 0.1441 0.02341  0.03802 0.0  0.0 0.0  " pathEditMode="relative" ptsTypes="">
+                                      <p:cBhvr>
+                                        <p:cTn id="19" dur="1000" decel="50000" fill="hold">
+                                          <p:stCondLst>
+                                            <p:cond delay="0"/>
+                                          </p:stCondLst>
+                                        </p:cTn>
+                                        <p:tgtEl>
+                                          <p:spTgt spid="10"/>
+                                        </p:tgtEl>
+                                        <p:attrNameLst>
+                                          <p:attrName>ppt_x</p:attrName>
+                                          <p:attrName>ppt_y</p:attrName>
+                                        </p:attrNameLst>
+                                      </p:cBhvr>
+                                    </p:animMotion>
+                                    <p:animEffect transition="in" filter="fade">
+                                      <p:cBhvr>
+                                        <p:cTn id="20" dur="1000"/>
+                                        <p:tgtEl>
+                                          <p:spTgt spid="10"/>
+                                        </p:tgtEl>
+                                      </p:cBhvr>
+                                    </p:animEffect>
+                                  </p:childTnLst>
+                                </p:cTn>
+                              </p:par>
+                            </p:childTnLst>
+                          </p:cTn>
+                        </p:par>
+                      </p:childTnLst>
+                    </p:cTn>
+                  </p:par>
+                </p:childTnLst>
+              </p:cTn>
+              <p:prevCondLst>
+                <p:cond evt="onPrev" delay="0">
+                  <p:tgtEl>
+                    <p:sldTgt/>
+                  </p:tgtEl>
+                </p:cond>
+              </p:prevCondLst>
+              <p:nextCondLst>
+                <p:cond evt="onNext" delay="0">
+                  <p:tgtEl>
+                    <p:sldTgt/>
+                  </p:tgtEl>
+                </p:cond>
+              </p:nextCondLst>
+            </p:seq>
+          </p:childTnLst>
+        </p:cTn>
+      </p:par>
+    </p:tnLst>
+    <p:bldLst>
+      <p:bldP spid="9" grpId="0"/>
+      <p:bldP spid="10" grpId="0"/>
+      <p:bldP spid="14" grpId="0"/>
+    </p:bldLst>
+  </p:timing>
+</p:sld>
+</file>
+
+<file path=ppt/slides/slide7.xml><?xml version="1.0" encoding="utf-8"?>
+<p:sld xmlns:a="http://schemas.openxmlformats.org/drawingml/2006/main" xmlns:r="http://schemas.openxmlformats.org/officeDocument/2006/relationships" xmlns:p="http://schemas.openxmlformats.org/presentationml/2006/main">
+  <p:cSld>
+    <p:spTree>
+      <p:nvGrpSpPr>
+        <p:cNvPr id="1" name=""/>
+        <p:cNvGrpSpPr/>
+        <p:nvPr/>
+      </p:nvGrpSpPr>
+      <p:grpSpPr>
+        <a:xfrm>
+          <a:off x="0" y="0"/>
+          <a:ext cx="0" cy="0"/>
+          <a:chOff x="0" y="0"/>
+          <a:chExt cx="0" cy="0"/>
+        </a:xfrm>
+      </p:grpSpPr>
+      <p:sp>
+        <p:nvSpPr>
           <p:cNvPr id="4" name="TextBox 3"/>
           <p:cNvSpPr txBox="1"/>
           <p:nvPr/>
@@ -21135,14 +21498,14 @@
             <a:pPr algn="ctr"/>
             <a:r>
               <a:rPr lang="zh-CN" altLang="en-US" sz="3000" dirty="0">
-                <a:latin typeface="微软雅黑" pitchFamily="34" charset="-122"/>
-                <a:ea typeface="微软雅黑" pitchFamily="34" charset="-122"/>
+                <a:latin typeface="微软雅黑" panose="020B0503020204020204" pitchFamily="34" charset="-122"/>
+                <a:ea typeface="微软雅黑" panose="020B0503020204020204" pitchFamily="34" charset="-122"/>
               </a:rPr>
               <a:t>人才培育</a:t>
             </a:r>
             <a:endParaRPr lang="zh-CN" altLang="en-US" sz="3000" dirty="0">
-              <a:latin typeface="微软雅黑" pitchFamily="34" charset="-122"/>
-              <a:ea typeface="微软雅黑" pitchFamily="34" charset="-122"/>
+              <a:latin typeface="微软雅黑" panose="020B0503020204020204" pitchFamily="34" charset="-122"/>
+              <a:ea typeface="微软雅黑" panose="020B0503020204020204" pitchFamily="34" charset="-122"/>
             </a:endParaRPr>
           </a:p>
         </p:txBody>
@@ -21196,24 +21559,7 @@
                 <a:ea typeface="微软雅黑" panose="020B0503020204020204" pitchFamily="34" charset="-122"/>
                 <a:sym typeface="+mn-ea"/>
               </a:rPr>
-              <a:t>   </a:t>
-            </a:r>
-            <a:r>
-              <a:rPr lang="en-US" altLang="zh-CN" sz="2000" dirty="0" smtClean="0">
-                <a:ln>
-                  <a:noFill/>
-                </a:ln>
-                <a:solidFill>
-                  <a:schemeClr val="tx1">
-                    <a:lumMod val="85000"/>
-                    <a:lumOff val="15000"/>
-                  </a:schemeClr>
-                </a:solidFill>
-                <a:latin typeface="微软雅黑" panose="020B0503020204020204" pitchFamily="34" charset="-122"/>
-                <a:ea typeface="微软雅黑" panose="020B0503020204020204" pitchFamily="34" charset="-122"/>
-                <a:sym typeface="+mn-ea"/>
-              </a:rPr>
-              <a:t> </a:t>
+              <a:t>    </a:t>
             </a:r>
             <a:r>
               <a:rPr lang="zh-CN" altLang="en-US" sz="2000" dirty="0" smtClean="0">
@@ -21623,6 +21969,17 @@
               </a:rPr>
               <a:t>１）</a:t>
             </a:r>
+            <a:endParaRPr lang="zh-CN" altLang="en-US" sz="1600" dirty="0" smtClean="0">
+              <a:ln>
+                <a:noFill/>
+              </a:ln>
+              <a:solidFill>
+                <a:schemeClr val="bg1"/>
+              </a:solidFill>
+              <a:latin typeface="微软雅黑" panose="020B0503020204020204" pitchFamily="34" charset="-122"/>
+              <a:ea typeface="微软雅黑" panose="020B0503020204020204" pitchFamily="34" charset="-122"/>
+              <a:sym typeface="+mn-ea"/>
+            </a:endParaRPr>
           </a:p>
         </p:txBody>
       </p:sp>
@@ -21698,6 +22055,17 @@
               </a:rPr>
               <a:t>）</a:t>
             </a:r>
+            <a:endParaRPr lang="zh-CN" altLang="en-US" sz="1600" dirty="0" smtClean="0">
+              <a:ln>
+                <a:noFill/>
+              </a:ln>
+              <a:solidFill>
+                <a:schemeClr val="bg1"/>
+              </a:solidFill>
+              <a:latin typeface="微软雅黑" panose="020B0503020204020204" pitchFamily="34" charset="-122"/>
+              <a:ea typeface="微软雅黑" panose="020B0503020204020204" pitchFamily="34" charset="-122"/>
+              <a:sym typeface="+mn-ea"/>
+            </a:endParaRPr>
           </a:p>
         </p:txBody>
       </p:sp>
@@ -21773,26 +22141,32 @@
               </a:rPr>
               <a:t>）</a:t>
             </a:r>
+            <a:endParaRPr lang="zh-CN" altLang="en-US" sz="1600" dirty="0" smtClean="0">
+              <a:ln>
+                <a:noFill/>
+              </a:ln>
+              <a:solidFill>
+                <a:schemeClr val="bg1"/>
+              </a:solidFill>
+              <a:latin typeface="微软雅黑" panose="020B0503020204020204" pitchFamily="34" charset="-122"/>
+              <a:ea typeface="微软雅黑" panose="020B0503020204020204" pitchFamily="34" charset="-122"/>
+              <a:sym typeface="+mn-ea"/>
+            </a:endParaRPr>
           </a:p>
         </p:txBody>
       </p:sp>
     </p:spTree>
-    <p:extLst>
-      <p:ext uri="{BB962C8B-B14F-4D97-AF65-F5344CB8AC3E}">
-        <p14:creationId xmlns:p14="http://schemas.microsoft.com/office/powerpoint/2010/main" val="3288544458"/>
-      </p:ext>
-    </p:extLst>
   </p:cSld>
   <p:clrMapOvr>
     <a:masterClrMapping/>
   </p:clrMapOvr>
-  <mc:AlternateContent xmlns:mc="http://schemas.openxmlformats.org/markup-compatibility/2006" xmlns:p14="http://schemas.microsoft.com/office/powerpoint/2010/main">
-    <mc:Choice Requires="p14">
+  <mc:AlternateContent xmlns:mc="http://schemas.openxmlformats.org/markup-compatibility/2006">
+    <mc:Choice xmlns:p14="http://schemas.microsoft.com/office/powerpoint/2010/main" Requires="p14">
       <p:transition spd="med" p14:dur="700">
         <p:fade/>
       </p:transition>
     </mc:Choice>
-    <mc:Fallback xmlns="">
+    <mc:Fallback>
       <p:transition spd="med">
         <p:fade/>
       </p:transition>
@@ -22059,8 +22433,6 @@
       </a:bgFillStyleLst>
     </a:fmtScheme>
   </a:themeElements>
-  <a:objectDefaults/>
-  <a:extraClrSchemeLst/>
   <a:extLst>
     <a:ext uri="{05A4C25C-085E-4340-85A3-A5531E510DB2}">
       <thm15:themeFamily xmlns:thm15="http://schemas.microsoft.com/office/thememl/2012/main" name="Office Theme" id="{62F939B6-93AF-4DB8-9C6B-D6C7DFDC589F}" vid="{4A3C46E8-61CC-4603-A589-7422A47A8E4A}"/>
@@ -22317,8 +22689,11 @@
       </a:bgFillStyleLst>
     </a:fmtScheme>
   </a:themeElements>
-  <a:objectDefaults/>
-  <a:extraClrSchemeLst/>
+  <a:extLst>
+    <a:ext uri="{05A4C25C-085E-4340-85A3-A5531E510DB2}">
+      <thm15:themeFamily xmlns:thm15="http://schemas.microsoft.com/office/thememl/2012/main" name="Office Theme" id="{62F939B6-93AF-4DB8-9C6B-D6C7DFDC589F}" vid="{4A3C46E8-61CC-4603-A589-7422A47A8E4A}"/>
+    </a:ext>
+  </a:extLst>
 </a:theme>
 </file>
 
@@ -22570,7 +22945,10 @@
       </a:bgFillStyleLst>
     </a:fmtScheme>
   </a:themeElements>
-  <a:objectDefaults/>
-  <a:extraClrSchemeLst/>
+  <a:extLst>
+    <a:ext uri="{05A4C25C-085E-4340-85A3-A5531E510DB2}">
+      <thm15:themeFamily xmlns:thm15="http://schemas.microsoft.com/office/thememl/2012/main" name="Office Theme" id="{62F939B6-93AF-4DB8-9C6B-D6C7DFDC589F}" vid="{4A3C46E8-61CC-4603-A589-7422A47A8E4A}"/>
+    </a:ext>
+  </a:extLst>
 </a:theme>
 </file>